--- a/.lessons/21 Fundamental CRUD/12 Implementing Soft Deleting And Show Row List/1.pptx
+++ b/.lessons/21 Fundamental CRUD/12 Implementing Soft Deleting And Show Row List/1.pptx
@@ -8,7 +8,14 @@
     <p:sldId id="401" r:id="rId2"/>
     <p:sldId id="402" r:id="rId3"/>
     <p:sldId id="403" r:id="rId4"/>
-    <p:sldId id="400" r:id="rId5"/>
+    <p:sldId id="404" r:id="rId5"/>
+    <p:sldId id="405" r:id="rId6"/>
+    <p:sldId id="406" r:id="rId7"/>
+    <p:sldId id="407" r:id="rId8"/>
+    <p:sldId id="400" r:id="rId9"/>
+    <p:sldId id="408" r:id="rId10"/>
+    <p:sldId id="409" r:id="rId11"/>
+    <p:sldId id="410" r:id="rId12"/>
   </p:sldIdLst>
   <p:sldSz cx="12192000" cy="6858000"/>
   <p:notesSz cx="6858000" cy="9144000"/>
@@ -262,7 +269,7 @@
           <a:p>
             <a:fld id="{3E102D2E-813C-461C-9963-687A650C48C0}" type="datetimeFigureOut">
               <a:rPr lang="en-US" smtClean="0"/>
-              <a:t>4/26/2025</a:t>
+              <a:t>5/21/2025</a:t>
             </a:fld>
             <a:endParaRPr lang="en-US"/>
           </a:p>
@@ -460,7 +467,7 @@
           <a:p>
             <a:fld id="{3E102D2E-813C-461C-9963-687A650C48C0}" type="datetimeFigureOut">
               <a:rPr lang="en-US" smtClean="0"/>
-              <a:t>4/26/2025</a:t>
+              <a:t>5/21/2025</a:t>
             </a:fld>
             <a:endParaRPr lang="en-US"/>
           </a:p>
@@ -668,7 +675,7 @@
           <a:p>
             <a:fld id="{3E102D2E-813C-461C-9963-687A650C48C0}" type="datetimeFigureOut">
               <a:rPr lang="en-US" smtClean="0"/>
-              <a:t>4/26/2025</a:t>
+              <a:t>5/21/2025</a:t>
             </a:fld>
             <a:endParaRPr lang="en-US"/>
           </a:p>
@@ -866,7 +873,7 @@
           <a:p>
             <a:fld id="{3E102D2E-813C-461C-9963-687A650C48C0}" type="datetimeFigureOut">
               <a:rPr lang="en-US" smtClean="0"/>
-              <a:t>4/26/2025</a:t>
+              <a:t>5/21/2025</a:t>
             </a:fld>
             <a:endParaRPr lang="en-US"/>
           </a:p>
@@ -1141,7 +1148,7 @@
           <a:p>
             <a:fld id="{3E102D2E-813C-461C-9963-687A650C48C0}" type="datetimeFigureOut">
               <a:rPr lang="en-US" smtClean="0"/>
-              <a:t>4/26/2025</a:t>
+              <a:t>5/21/2025</a:t>
             </a:fld>
             <a:endParaRPr lang="en-US"/>
           </a:p>
@@ -1406,7 +1413,7 @@
           <a:p>
             <a:fld id="{3E102D2E-813C-461C-9963-687A650C48C0}" type="datetimeFigureOut">
               <a:rPr lang="en-US" smtClean="0"/>
-              <a:t>4/26/2025</a:t>
+              <a:t>5/21/2025</a:t>
             </a:fld>
             <a:endParaRPr lang="en-US"/>
           </a:p>
@@ -1818,7 +1825,7 @@
           <a:p>
             <a:fld id="{3E102D2E-813C-461C-9963-687A650C48C0}" type="datetimeFigureOut">
               <a:rPr lang="en-US" smtClean="0"/>
-              <a:t>4/26/2025</a:t>
+              <a:t>5/21/2025</a:t>
             </a:fld>
             <a:endParaRPr lang="en-US"/>
           </a:p>
@@ -1959,7 +1966,7 @@
           <a:p>
             <a:fld id="{3E102D2E-813C-461C-9963-687A650C48C0}" type="datetimeFigureOut">
               <a:rPr lang="en-US" smtClean="0"/>
-              <a:t>4/26/2025</a:t>
+              <a:t>5/21/2025</a:t>
             </a:fld>
             <a:endParaRPr lang="en-US"/>
           </a:p>
@@ -2072,7 +2079,7 @@
           <a:p>
             <a:fld id="{3E102D2E-813C-461C-9963-687A650C48C0}" type="datetimeFigureOut">
               <a:rPr lang="en-US" smtClean="0"/>
-              <a:t>4/26/2025</a:t>
+              <a:t>5/21/2025</a:t>
             </a:fld>
             <a:endParaRPr lang="en-US"/>
           </a:p>
@@ -2383,7 +2390,7 @@
           <a:p>
             <a:fld id="{3E102D2E-813C-461C-9963-687A650C48C0}" type="datetimeFigureOut">
               <a:rPr lang="en-US" smtClean="0"/>
-              <a:t>4/26/2025</a:t>
+              <a:t>5/21/2025</a:t>
             </a:fld>
             <a:endParaRPr lang="en-US"/>
           </a:p>
@@ -2671,7 +2678,7 @@
           <a:p>
             <a:fld id="{3E102D2E-813C-461C-9963-687A650C48C0}" type="datetimeFigureOut">
               <a:rPr lang="en-US" smtClean="0"/>
-              <a:t>4/26/2025</a:t>
+              <a:t>5/21/2025</a:t>
             </a:fld>
             <a:endParaRPr lang="en-US"/>
           </a:p>
@@ -2912,7 +2919,7 @@
           <a:p>
             <a:fld id="{3E102D2E-813C-461C-9963-687A650C48C0}" type="datetimeFigureOut">
               <a:rPr lang="en-US" smtClean="0"/>
-              <a:t>4/26/2025</a:t>
+              <a:t>5/21/2025</a:t>
             </a:fld>
             <a:endParaRPr lang="en-US"/>
           </a:p>
@@ -3350,6 +3357,296 @@
         <p:spPr>
           <a:xfrm>
             <a:off x="217714" y="255046"/>
+            <a:ext cx="11756571" cy="955518"/>
+          </a:xfrm>
+          <a:prstGeom prst="rect">
+            <a:avLst/>
+          </a:prstGeom>
+          <a:noFill/>
+        </p:spPr>
+        <p:txBody>
+          <a:bodyPr wrap="square">
+            <a:spAutoFit/>
+          </a:bodyPr>
+          <a:lstStyle/>
+          <a:p>
+            <a:pPr>
+              <a:lnSpc>
+                <a:spcPct val="150000"/>
+              </a:lnSpc>
+              <a:buNone/>
+            </a:pPr>
+            <a:r>
+              <a:rPr kumimoji="0" lang="az-Latn-AZ" altLang="en-US" sz="1300" b="0" i="0" u="none" strike="noStrike" cap="none" normalizeH="0" baseline="0">
+                <a:ln>
+                  <a:noFill/>
+                </a:ln>
+                <a:solidFill>
+                  <a:schemeClr val="tx1"/>
+                </a:solidFill>
+                <a:effectLst/>
+                <a:latin typeface="Arial" panose="020B0604020202020204" pitchFamily="34" charset="0"/>
+              </a:rPr>
+              <a:t>İlk öncə </a:t>
+            </a:r>
+            <a:r>
+              <a:rPr kumimoji="0" lang="az-Latn-AZ" altLang="en-US" sz="1300" b="1" i="0" u="none" strike="noStrike" cap="none" normalizeH="0" baseline="0">
+                <a:ln>
+                  <a:noFill/>
+                </a:ln>
+                <a:solidFill>
+                  <a:srgbClr val="FF0000"/>
+                </a:solidFill>
+                <a:effectLst/>
+                <a:latin typeface="Arial" panose="020B0604020202020204" pitchFamily="34" charset="0"/>
+              </a:rPr>
+              <a:t>softDelete</a:t>
+            </a:r>
+            <a:r>
+              <a:rPr kumimoji="0" lang="az-Latn-AZ" altLang="en-US" sz="1300" b="0" i="0" u="none" strike="noStrike" cap="none" normalizeH="0" baseline="0">
+                <a:ln>
+                  <a:noFill/>
+                </a:ln>
+                <a:solidFill>
+                  <a:schemeClr val="tx1"/>
+                </a:solidFill>
+                <a:effectLst/>
+                <a:latin typeface="Arial" panose="020B0604020202020204" pitchFamily="34" charset="0"/>
+              </a:rPr>
+              <a:t> tra</a:t>
+            </a:r>
+            <a:r>
+              <a:rPr lang="az-Latn-AZ" altLang="en-US" sz="1300">
+                <a:latin typeface="Arial" panose="020B0604020202020204" pitchFamily="34" charset="0"/>
+              </a:rPr>
+              <a:t>it -ini </a:t>
+            </a:r>
+            <a:r>
+              <a:rPr lang="az-Latn-AZ" altLang="en-US" sz="1300" b="1">
+                <a:solidFill>
+                  <a:srgbClr val="00B050"/>
+                </a:solidFill>
+                <a:latin typeface="Arial" panose="020B0604020202020204" pitchFamily="34" charset="0"/>
+              </a:rPr>
+              <a:t>Post</a:t>
+            </a:r>
+            <a:r>
+              <a:rPr lang="az-Latn-AZ" altLang="en-US" sz="1300">
+                <a:latin typeface="Arial" panose="020B0604020202020204" pitchFamily="34" charset="0"/>
+              </a:rPr>
+              <a:t> modelinə əlavə edirik. </a:t>
+            </a:r>
+          </a:p>
+          <a:p>
+            <a:pPr>
+              <a:lnSpc>
+                <a:spcPct val="150000"/>
+              </a:lnSpc>
+              <a:buNone/>
+            </a:pPr>
+            <a:endParaRPr kumimoji="0" lang="az-Latn-AZ" altLang="en-US" sz="1300" b="0" i="0" u="none" strike="noStrike" cap="none" normalizeH="0" baseline="0">
+              <a:ln>
+                <a:noFill/>
+              </a:ln>
+              <a:solidFill>
+                <a:schemeClr val="tx1"/>
+              </a:solidFill>
+              <a:effectLst/>
+              <a:latin typeface="Arial" panose="020B0604020202020204" pitchFamily="34" charset="0"/>
+            </a:endParaRPr>
+          </a:p>
+          <a:p>
+            <a:pPr>
+              <a:lnSpc>
+                <a:spcPct val="150000"/>
+              </a:lnSpc>
+              <a:buNone/>
+            </a:pPr>
+            <a:r>
+              <a:rPr kumimoji="0" lang="az-Latn-AZ" altLang="en-US" sz="1300" b="0" i="0" u="none" strike="noStrike" cap="none" normalizeH="0" baseline="0">
+                <a:ln>
+                  <a:noFill/>
+                </a:ln>
+                <a:solidFill>
+                  <a:schemeClr val="tx1"/>
+                </a:solidFill>
+                <a:effectLst/>
+                <a:latin typeface="Arial" panose="020B0604020202020204" pitchFamily="34" charset="0"/>
+              </a:rPr>
+              <a:t>Sonra </a:t>
+            </a:r>
+            <a:r>
+              <a:rPr kumimoji="0" lang="az-Latn-AZ" altLang="en-US" sz="1300" b="1" i="0" u="none" strike="noStrike" cap="none" normalizeH="0" baseline="0">
+                <a:ln>
+                  <a:noFill/>
+                </a:ln>
+                <a:solidFill>
+                  <a:srgbClr val="00B050"/>
+                </a:solidFill>
+                <a:effectLst/>
+                <a:latin typeface="Arial" panose="020B0604020202020204" pitchFamily="34" charset="0"/>
+              </a:rPr>
+              <a:t>posts</a:t>
+            </a:r>
+            <a:r>
+              <a:rPr kumimoji="0" lang="az-Latn-AZ" altLang="en-US" sz="1300" b="0" i="0" u="none" strike="noStrike" cap="none" normalizeH="0" baseline="0">
+                <a:ln>
+                  <a:noFill/>
+                </a:ln>
+                <a:solidFill>
+                  <a:schemeClr val="tx1"/>
+                </a:solidFill>
+                <a:effectLst/>
+                <a:latin typeface="Arial" panose="020B0604020202020204" pitchFamily="34" charset="0"/>
+              </a:rPr>
+              <a:t> cədvəli üçün yeni bir </a:t>
+            </a:r>
+            <a:r>
+              <a:rPr kumimoji="0" lang="az-Latn-AZ" altLang="en-US" sz="1300" b="1" i="0" u="none" strike="noStrike" cap="none" normalizeH="0" baseline="0">
+                <a:ln>
+                  <a:noFill/>
+                </a:ln>
+                <a:solidFill>
+                  <a:schemeClr val="tx1"/>
+                </a:solidFill>
+                <a:effectLst/>
+                <a:latin typeface="Arial" panose="020B0604020202020204" pitchFamily="34" charset="0"/>
+              </a:rPr>
+              <a:t>migration</a:t>
+            </a:r>
+            <a:r>
+              <a:rPr kumimoji="0" lang="az-Latn-AZ" altLang="en-US" sz="1300" b="0" i="0" u="none" strike="noStrike" cap="none" normalizeH="0" baseline="0">
+                <a:ln>
+                  <a:noFill/>
+                </a:ln>
+                <a:solidFill>
+                  <a:schemeClr val="tx1"/>
+                </a:solidFill>
+                <a:effectLst/>
+                <a:latin typeface="Arial" panose="020B0604020202020204" pitchFamily="34" charset="0"/>
+              </a:rPr>
+              <a:t> yaradırıq ki, həmin cədvələ </a:t>
+            </a:r>
+            <a:r>
+              <a:rPr kumimoji="0" lang="az-Latn-AZ" altLang="en-US" sz="1300" b="1" i="0" u="none" strike="noStrike" cap="none" normalizeH="0" baseline="0">
+                <a:ln>
+                  <a:noFill/>
+                </a:ln>
+                <a:solidFill>
+                  <a:srgbClr val="0070C0"/>
+                </a:solidFill>
+                <a:effectLst/>
+                <a:latin typeface="Arial" panose="020B0604020202020204" pitchFamily="34" charset="0"/>
+              </a:rPr>
+              <a:t>deleted_at </a:t>
+            </a:r>
+            <a:r>
+              <a:rPr kumimoji="0" lang="az-Latn-AZ" altLang="en-US" sz="1300" b="0" i="0" u="none" strike="noStrike" cap="none" normalizeH="0" baseline="0">
+                <a:ln>
+                  <a:noFill/>
+                </a:ln>
+                <a:solidFill>
+                  <a:schemeClr val="tx1"/>
+                </a:solidFill>
+                <a:effectLst/>
+                <a:latin typeface="Arial" panose="020B0604020202020204" pitchFamily="34" charset="0"/>
+              </a:rPr>
+              <a:t>sütununu əlavə edək. </a:t>
+            </a:r>
+            <a:endParaRPr kumimoji="0" lang="en-US" altLang="en-US" sz="1300" b="0" i="0" u="none" strike="noStrike" cap="none" normalizeH="0" baseline="0">
+              <a:ln>
+                <a:noFill/>
+              </a:ln>
+              <a:solidFill>
+                <a:schemeClr val="tx1"/>
+              </a:solidFill>
+              <a:effectLst/>
+              <a:latin typeface="Arial" panose="020B0604020202020204" pitchFamily="34" charset="0"/>
+            </a:endParaRPr>
+          </a:p>
+        </p:txBody>
+      </p:sp>
+      <p:pic>
+        <p:nvPicPr>
+          <p:cNvPr id="4" name="Picture 3">
+            <a:extLst>
+              <a:ext uri="{FF2B5EF4-FFF2-40B4-BE49-F238E27FC236}">
+                <a16:creationId xmlns:a16="http://schemas.microsoft.com/office/drawing/2014/main" id="{86F1785C-D033-40B7-E5F1-BADA4181E34F}"/>
+              </a:ext>
+            </a:extLst>
+          </p:cNvPr>
+          <p:cNvPicPr>
+            <a:picLocks noChangeAspect="1"/>
+          </p:cNvPicPr>
+          <p:nvPr/>
+        </p:nvPicPr>
+        <p:blipFill>
+          <a:blip r:embed="rId2"/>
+          <a:stretch>
+            <a:fillRect/>
+          </a:stretch>
+        </p:blipFill>
+        <p:spPr>
+          <a:xfrm>
+            <a:off x="0" y="2624938"/>
+            <a:ext cx="12192000" cy="4233062"/>
+          </a:xfrm>
+          <a:prstGeom prst="rect">
+            <a:avLst/>
+          </a:prstGeom>
+        </p:spPr>
+      </p:pic>
+    </p:spTree>
+    <p:extLst>
+      <p:ext uri="{BB962C8B-B14F-4D97-AF65-F5344CB8AC3E}">
+        <p14:creationId xmlns:p14="http://schemas.microsoft.com/office/powerpoint/2010/main" val="4240944397"/>
+      </p:ext>
+    </p:extLst>
+  </p:cSld>
+  <p:clrMapOvr>
+    <a:masterClrMapping/>
+  </p:clrMapOvr>
+</p:sld>
+</file>
+
+<file path=ppt/slides/slide10.xml><?xml version="1.0" encoding="utf-8"?>
+<p:sld xmlns:a="http://schemas.openxmlformats.org/drawingml/2006/main" xmlns:r="http://schemas.openxmlformats.org/officeDocument/2006/relationships" xmlns:p="http://schemas.openxmlformats.org/presentationml/2006/main">
+  <p:cSld>
+    <p:spTree>
+      <p:nvGrpSpPr>
+        <p:cNvPr id="1" name="">
+          <a:extLst>
+            <a:ext uri="{FF2B5EF4-FFF2-40B4-BE49-F238E27FC236}">
+              <a16:creationId xmlns:a16="http://schemas.microsoft.com/office/drawing/2014/main" id="{C813E439-6A43-C5C0-046B-9AA1D014E9A8}"/>
+            </a:ext>
+          </a:extLst>
+        </p:cNvPr>
+        <p:cNvGrpSpPr/>
+        <p:nvPr/>
+      </p:nvGrpSpPr>
+      <p:grpSpPr>
+        <a:xfrm>
+          <a:off x="0" y="0"/>
+          <a:ext cx="0" cy="0"/>
+          <a:chOff x="0" y="0"/>
+          <a:chExt cx="0" cy="0"/>
+        </a:xfrm>
+      </p:grpSpPr>
+      <p:sp>
+        <p:nvSpPr>
+          <p:cNvPr id="3" name="TextBox 2">
+            <a:extLst>
+              <a:ext uri="{FF2B5EF4-FFF2-40B4-BE49-F238E27FC236}">
+                <a16:creationId xmlns:a16="http://schemas.microsoft.com/office/drawing/2014/main" id="{2EF3D29E-62D9-97B2-3691-5A43F8F2FC27}"/>
+              </a:ext>
+            </a:extLst>
+          </p:cNvPr>
+          <p:cNvSpPr txBox="1"/>
+          <p:nvPr/>
+        </p:nvSpPr>
+        <p:spPr>
+          <a:xfrm>
+            <a:off x="217714" y="255046"/>
             <a:ext cx="11756571" cy="355354"/>
           </a:xfrm>
           <a:prstGeom prst="rect">
@@ -3388,7 +3685,93 @@
     </p:spTree>
     <p:extLst>
       <p:ext uri="{BB962C8B-B14F-4D97-AF65-F5344CB8AC3E}">
-        <p14:creationId xmlns:p14="http://schemas.microsoft.com/office/powerpoint/2010/main" val="4240944397"/>
+        <p14:creationId xmlns:p14="http://schemas.microsoft.com/office/powerpoint/2010/main" val="355473754"/>
+      </p:ext>
+    </p:extLst>
+  </p:cSld>
+  <p:clrMapOvr>
+    <a:masterClrMapping/>
+  </p:clrMapOvr>
+</p:sld>
+</file>
+
+<file path=ppt/slides/slide11.xml><?xml version="1.0" encoding="utf-8"?>
+<p:sld xmlns:a="http://schemas.openxmlformats.org/drawingml/2006/main" xmlns:r="http://schemas.openxmlformats.org/officeDocument/2006/relationships" xmlns:p="http://schemas.openxmlformats.org/presentationml/2006/main">
+  <p:cSld>
+    <p:spTree>
+      <p:nvGrpSpPr>
+        <p:cNvPr id="1" name="">
+          <a:extLst>
+            <a:ext uri="{FF2B5EF4-FFF2-40B4-BE49-F238E27FC236}">
+              <a16:creationId xmlns:a16="http://schemas.microsoft.com/office/drawing/2014/main" id="{3C2455DD-C842-BBC2-0BDA-13D20FA7DEDD}"/>
+            </a:ext>
+          </a:extLst>
+        </p:cNvPr>
+        <p:cNvGrpSpPr/>
+        <p:nvPr/>
+      </p:nvGrpSpPr>
+      <p:grpSpPr>
+        <a:xfrm>
+          <a:off x="0" y="0"/>
+          <a:ext cx="0" cy="0"/>
+          <a:chOff x="0" y="0"/>
+          <a:chExt cx="0" cy="0"/>
+        </a:xfrm>
+      </p:grpSpPr>
+      <p:sp>
+        <p:nvSpPr>
+          <p:cNvPr id="3" name="TextBox 2">
+            <a:extLst>
+              <a:ext uri="{FF2B5EF4-FFF2-40B4-BE49-F238E27FC236}">
+                <a16:creationId xmlns:a16="http://schemas.microsoft.com/office/drawing/2014/main" id="{AD656717-6B7B-4CEC-7D5A-D5F230A771F9}"/>
+              </a:ext>
+            </a:extLst>
+          </p:cNvPr>
+          <p:cNvSpPr txBox="1"/>
+          <p:nvPr/>
+        </p:nvSpPr>
+        <p:spPr>
+          <a:xfrm>
+            <a:off x="217714" y="255046"/>
+            <a:ext cx="11756571" cy="355354"/>
+          </a:xfrm>
+          <a:prstGeom prst="rect">
+            <a:avLst/>
+          </a:prstGeom>
+          <a:noFill/>
+        </p:spPr>
+        <p:txBody>
+          <a:bodyPr wrap="square">
+            <a:spAutoFit/>
+          </a:bodyPr>
+          <a:lstStyle/>
+          <a:p>
+            <a:pPr>
+              <a:lnSpc>
+                <a:spcPct val="150000"/>
+              </a:lnSpc>
+              <a:buNone/>
+            </a:pPr>
+            <a:r>
+              <a:rPr kumimoji="0" lang="en-US" altLang="en-US" sz="1300" b="0" i="0" u="none" strike="noStrike" cap="none" normalizeH="0" baseline="0">
+                <a:ln>
+                  <a:noFill/>
+                </a:ln>
+                <a:solidFill>
+                  <a:schemeClr val="tx1"/>
+                </a:solidFill>
+                <a:effectLst/>
+                <a:latin typeface="Arial" panose="020B0604020202020204" pitchFamily="34" charset="0"/>
+              </a:rPr>
+              <a:t>.</a:t>
+            </a:r>
+          </a:p>
+        </p:txBody>
+      </p:sp>
+    </p:spTree>
+    <p:extLst>
+      <p:ext uri="{BB962C8B-B14F-4D97-AF65-F5344CB8AC3E}">
+        <p14:creationId xmlns:p14="http://schemas.microsoft.com/office/powerpoint/2010/main" val="1563677876"/>
       </p:ext>
     </p:extLst>
   </p:cSld>
@@ -3456,7 +3839,7 @@
               <a:buNone/>
             </a:pPr>
             <a:r>
-              <a:rPr kumimoji="0" lang="en-US" altLang="en-US" sz="1300" b="0" i="0" u="none" strike="noStrike" cap="none" normalizeH="0" baseline="0">
+              <a:rPr kumimoji="0" lang="az-Latn-AZ" altLang="en-US" sz="1300" b="0" i="0" u="none" strike="noStrike" cap="none" normalizeH="0" baseline="0">
                 <a:ln>
                   <a:noFill/>
                 </a:ln>
@@ -3466,11 +3849,96 @@
                 <a:effectLst/>
                 <a:latin typeface="Arial" panose="020B0604020202020204" pitchFamily="34" charset="0"/>
               </a:rPr>
-              <a:t>.</a:t>
-            </a:r>
-          </a:p>
-        </p:txBody>
-      </p:sp>
+              <a:t>Datanı </a:t>
+            </a:r>
+            <a:r>
+              <a:rPr lang="az-Latn-AZ" altLang="en-US" sz="1300">
+                <a:latin typeface="Arial" panose="020B0604020202020204" pitchFamily="34" charset="0"/>
+              </a:rPr>
+              <a:t>sildikdən </a:t>
+            </a:r>
+            <a:r>
+              <a:rPr kumimoji="0" lang="az-Latn-AZ" altLang="en-US" sz="1300" b="0" i="0" u="none" strike="noStrike" cap="none" normalizeH="0" baseline="0">
+                <a:ln>
+                  <a:noFill/>
+                </a:ln>
+                <a:solidFill>
+                  <a:schemeClr val="tx1"/>
+                </a:solidFill>
+                <a:effectLst/>
+                <a:latin typeface="Arial" panose="020B0604020202020204" pitchFamily="34" charset="0"/>
+              </a:rPr>
+              <a:t>sonra </a:t>
+            </a:r>
+            <a:r>
+              <a:rPr lang="az-Latn-AZ" altLang="en-US" sz="1300" b="1">
+                <a:latin typeface="Arial" panose="020B0604020202020204" pitchFamily="34" charset="0"/>
+              </a:rPr>
+              <a:t>deleted_at </a:t>
+            </a:r>
+            <a:r>
+              <a:rPr lang="az-Latn-AZ" altLang="en-US" sz="1300">
+                <a:latin typeface="Arial" panose="020B0604020202020204" pitchFamily="34" charset="0"/>
+              </a:rPr>
+              <a:t>sütununda tarix yaradılacaq. Silmək dedikdə burada nəzərdə tutulan həmin datanın gizlədilməsidir. </a:t>
+            </a:r>
+            <a:endParaRPr kumimoji="0" lang="en-US" altLang="en-US" sz="1300" b="0" i="0" u="none" strike="noStrike" cap="none" normalizeH="0" baseline="0">
+              <a:ln>
+                <a:noFill/>
+              </a:ln>
+              <a:solidFill>
+                <a:schemeClr val="tx1"/>
+              </a:solidFill>
+              <a:effectLst/>
+              <a:latin typeface="Arial" panose="020B0604020202020204" pitchFamily="34" charset="0"/>
+            </a:endParaRPr>
+          </a:p>
+        </p:txBody>
+      </p:sp>
+      <p:pic>
+        <p:nvPicPr>
+          <p:cNvPr id="4" name="Picture 3">
+            <a:extLst>
+              <a:ext uri="{FF2B5EF4-FFF2-40B4-BE49-F238E27FC236}">
+                <a16:creationId xmlns:a16="http://schemas.microsoft.com/office/drawing/2014/main" id="{3277A135-FE63-ECE9-94D7-C1674E24E0D0}"/>
+              </a:ext>
+            </a:extLst>
+          </p:cNvPr>
+          <p:cNvPicPr>
+            <a:picLocks noChangeAspect="1"/>
+          </p:cNvPicPr>
+          <p:nvPr/>
+        </p:nvPicPr>
+        <p:blipFill>
+          <a:blip r:embed="rId2"/>
+          <a:stretch>
+            <a:fillRect/>
+          </a:stretch>
+        </p:blipFill>
+        <p:spPr>
+          <a:xfrm>
+            <a:off x="-1" y="3692250"/>
+            <a:ext cx="12192000" cy="3165750"/>
+          </a:xfrm>
+          <a:prstGeom prst="rect">
+            <a:avLst/>
+          </a:prstGeom>
+          <a:ln w="38100" cap="sq">
+            <a:solidFill>
+              <a:srgbClr val="000000"/>
+            </a:solidFill>
+            <a:prstDash val="solid"/>
+            <a:miter lim="800000"/>
+          </a:ln>
+          <a:effectLst>
+            <a:outerShdw blurRad="50800" dist="38100" dir="2700000" algn="tl" rotWithShape="0">
+              <a:srgbClr val="000000">
+                <a:alpha val="43000"/>
+              </a:srgbClr>
+            </a:outerShdw>
+          </a:effectLst>
+        </p:spPr>
+      </p:pic>
     </p:spTree>
     <p:extLst>
       <p:ext uri="{BB962C8B-B14F-4D97-AF65-F5344CB8AC3E}">
@@ -3522,7 +3990,7 @@
         <p:spPr>
           <a:xfrm>
             <a:off x="217714" y="255046"/>
-            <a:ext cx="11756571" cy="355354"/>
+            <a:ext cx="11756571" cy="1555682"/>
           </a:xfrm>
           <a:prstGeom prst="rect">
             <a:avLst/>
@@ -3542,21 +4010,323 @@
               <a:buNone/>
             </a:pPr>
             <a:r>
-              <a:rPr kumimoji="0" lang="en-US" altLang="en-US" sz="1300" b="0" i="0" u="none" strike="noStrike" cap="none" normalizeH="0" baseline="0">
+              <a:rPr lang="az-Latn-AZ" altLang="en-US" sz="1300">
+                <a:latin typeface="Arial" panose="020B0604020202020204" pitchFamily="34" charset="0"/>
+              </a:rPr>
+              <a:t>İndi isə, </a:t>
+            </a:r>
+            <a:r>
+              <a:rPr lang="az-Latn-AZ" altLang="en-US" sz="1300" b="1">
+                <a:latin typeface="Arial" panose="020B0604020202020204" pitchFamily="34" charset="0"/>
+              </a:rPr>
+              <a:t>index.blade.php </a:t>
+            </a:r>
+            <a:r>
+              <a:rPr lang="az-Latn-AZ" altLang="en-US" sz="1300">
+                <a:latin typeface="Arial" panose="020B0604020202020204" pitchFamily="34" charset="0"/>
+              </a:rPr>
+              <a:t>faylında olan kodları </a:t>
+            </a:r>
+            <a:r>
+              <a:rPr lang="az-Latn-AZ" altLang="en-US" sz="1300" b="1">
+                <a:latin typeface="Arial" panose="020B0604020202020204" pitchFamily="34" charset="0"/>
+              </a:rPr>
+              <a:t>trashed.blade.php </a:t>
+            </a:r>
+            <a:r>
+              <a:rPr lang="az-Latn-AZ" altLang="en-US" sz="1300">
+                <a:latin typeface="Arial" panose="020B0604020202020204" pitchFamily="34" charset="0"/>
+              </a:rPr>
+              <a:t>faylına copy past edirik. </a:t>
+            </a:r>
+          </a:p>
+          <a:p>
+            <a:pPr>
+              <a:lnSpc>
+                <a:spcPct val="150000"/>
+              </a:lnSpc>
+              <a:buNone/>
+            </a:pPr>
+            <a:endParaRPr kumimoji="0" lang="az-Latn-AZ" altLang="en-US" sz="1300" b="0" i="0" u="none" strike="noStrike" cap="none" normalizeH="0" baseline="0">
+              <a:ln>
+                <a:noFill/>
+              </a:ln>
+              <a:solidFill>
+                <a:schemeClr val="tx1"/>
+              </a:solidFill>
+              <a:effectLst/>
+              <a:latin typeface="Arial" panose="020B0604020202020204" pitchFamily="34" charset="0"/>
+            </a:endParaRPr>
+          </a:p>
+          <a:p>
+            <a:pPr>
+              <a:lnSpc>
+                <a:spcPct val="150000"/>
+              </a:lnSpc>
+              <a:buNone/>
+            </a:pPr>
+            <a:endParaRPr lang="az-Latn-AZ" altLang="en-US" sz="1300">
+              <a:latin typeface="Arial" panose="020B0604020202020204" pitchFamily="34" charset="0"/>
+            </a:endParaRPr>
+          </a:p>
+          <a:p>
+            <a:pPr>
+              <a:lnSpc>
+                <a:spcPct val="150000"/>
+              </a:lnSpc>
+              <a:buNone/>
+            </a:pPr>
+            <a:r>
+              <a:rPr kumimoji="0" lang="az-Latn-AZ" altLang="en-US" sz="1300" b="1" i="0" u="none" strike="noStrike" cap="none" normalizeH="0" baseline="0">
                 <a:ln>
                   <a:noFill/>
                 </a:ln>
                 <a:solidFill>
+                  <a:schemeClr val="accent2"/>
+                </a:solidFill>
+                <a:effectLst/>
+                <a:latin typeface="Arial" panose="020B0604020202020204" pitchFamily="34" charset="0"/>
+              </a:rPr>
+              <a:t>VACİB QEYD</a:t>
+            </a:r>
+            <a:r>
+              <a:rPr kumimoji="0" lang="az-Latn-AZ" altLang="en-US" sz="1300" b="0" i="0" u="none" strike="noStrike" cap="none" normalizeH="0" baseline="0">
+                <a:ln>
+                  <a:noFill/>
+                </a:ln>
+                <a:solidFill>
                   <a:schemeClr val="tx1"/>
                 </a:solidFill>
                 <a:effectLst/>
                 <a:latin typeface="Arial" panose="020B0604020202020204" pitchFamily="34" charset="0"/>
               </a:rPr>
-              <a:t>.</a:t>
-            </a:r>
-          </a:p>
-        </p:txBody>
-      </p:sp>
+              <a:t>: </a:t>
+            </a:r>
+            <a:r>
+              <a:rPr kumimoji="0" lang="az-Latn-AZ" altLang="en-US" sz="1300" b="1" i="0" u="none" strike="noStrike" cap="none" normalizeH="0" baseline="0">
+                <a:ln>
+                  <a:noFill/>
+                </a:ln>
+                <a:solidFill>
+                  <a:schemeClr val="tx1"/>
+                </a:solidFill>
+                <a:effectLst/>
+                <a:latin typeface="Arial" panose="020B0604020202020204" pitchFamily="34" charset="0"/>
+              </a:rPr>
+              <a:t>Trashed</a:t>
+            </a:r>
+            <a:r>
+              <a:rPr kumimoji="0" lang="az-Latn-AZ" altLang="en-US" sz="1300" b="0" i="0" u="none" strike="noStrike" cap="none" normalizeH="0" baseline="0">
+                <a:ln>
+                  <a:noFill/>
+                </a:ln>
+                <a:solidFill>
+                  <a:schemeClr val="tx1"/>
+                </a:solidFill>
+                <a:effectLst/>
+                <a:latin typeface="Arial" panose="020B0604020202020204" pitchFamily="34" charset="0"/>
+              </a:rPr>
+              <a:t> şablonu, </a:t>
+            </a:r>
+            <a:r>
+              <a:rPr kumimoji="0" lang="az-Latn-AZ" altLang="en-US" sz="1300" b="1" i="0" u="none" strike="noStrike" cap="none" normalizeH="0" baseline="0">
+                <a:ln>
+                  <a:noFill/>
+                </a:ln>
+                <a:solidFill>
+                  <a:schemeClr val="tx1"/>
+                </a:solidFill>
+                <a:effectLst/>
+                <a:latin typeface="Arial" panose="020B0604020202020204" pitchFamily="34" charset="0"/>
+              </a:rPr>
+              <a:t>CRUD</a:t>
+            </a:r>
+            <a:r>
+              <a:rPr kumimoji="0" lang="az-Latn-AZ" altLang="en-US" sz="1300" b="0" i="0" u="none" strike="noStrike" cap="none" normalizeH="0" baseline="0">
+                <a:ln>
+                  <a:noFill/>
+                </a:ln>
+                <a:solidFill>
+                  <a:schemeClr val="tx1"/>
+                </a:solidFill>
+                <a:effectLst/>
+                <a:latin typeface="Arial" panose="020B0604020202020204" pitchFamily="34" charset="0"/>
+              </a:rPr>
+              <a:t> sistemində mövcud deyildir. </a:t>
+            </a:r>
+            <a:r>
+              <a:rPr kumimoji="0" lang="az-Latn-AZ" altLang="en-US" sz="1300" b="1" i="0" u="none" strike="noStrike" cap="none" normalizeH="0" baseline="0">
+                <a:ln>
+                  <a:noFill/>
+                </a:ln>
+                <a:solidFill>
+                  <a:schemeClr val="tx1"/>
+                </a:solidFill>
+                <a:effectLst/>
+                <a:latin typeface="Arial" panose="020B0604020202020204" pitchFamily="34" charset="0"/>
+              </a:rPr>
+              <a:t>CRUD</a:t>
+            </a:r>
+            <a:r>
+              <a:rPr kumimoji="0" lang="az-Latn-AZ" altLang="en-US" sz="1300" b="0" i="0" u="none" strike="noStrike" cap="none" normalizeH="0" baseline="0">
+                <a:ln>
+                  <a:noFill/>
+                </a:ln>
+                <a:solidFill>
+                  <a:schemeClr val="tx1"/>
+                </a:solidFill>
+                <a:effectLst/>
+                <a:latin typeface="Arial" panose="020B0604020202020204" pitchFamily="34" charset="0"/>
+              </a:rPr>
+              <a:t> sistemində sadəcə aşağıdakı </a:t>
+            </a:r>
+            <a:r>
+              <a:rPr kumimoji="0" lang="az-Latn-AZ" altLang="en-US" sz="1300" b="1" i="0" u="none" strike="noStrike" cap="none" normalizeH="0" baseline="0">
+                <a:ln>
+                  <a:noFill/>
+                </a:ln>
+                <a:solidFill>
+                  <a:schemeClr val="tx1"/>
+                </a:solidFill>
+                <a:effectLst/>
+                <a:latin typeface="Arial" panose="020B0604020202020204" pitchFamily="34" charset="0"/>
+              </a:rPr>
+              <a:t>routlar</a:t>
+            </a:r>
+            <a:r>
+              <a:rPr kumimoji="0" lang="az-Latn-AZ" altLang="en-US" sz="1300" b="0" i="0" u="none" strike="noStrike" cap="none" normalizeH="0" baseline="0">
+                <a:ln>
+                  <a:noFill/>
+                </a:ln>
+                <a:solidFill>
+                  <a:schemeClr val="tx1"/>
+                </a:solidFill>
+                <a:effectLst/>
+                <a:latin typeface="Arial" panose="020B0604020202020204" pitchFamily="34" charset="0"/>
+              </a:rPr>
+              <a:t> mövcuddur. Əlavə şablonlar üçün lazım olan </a:t>
+            </a:r>
+            <a:r>
+              <a:rPr kumimoji="0" lang="az-Latn-AZ" altLang="en-US" sz="1300" b="1" i="0" u="none" strike="noStrike" cap="none" normalizeH="0" baseline="0">
+                <a:ln>
+                  <a:noFill/>
+                </a:ln>
+                <a:solidFill>
+                  <a:schemeClr val="tx1"/>
+                </a:solidFill>
+                <a:effectLst/>
+                <a:latin typeface="Arial" panose="020B0604020202020204" pitchFamily="34" charset="0"/>
+              </a:rPr>
+              <a:t>route</a:t>
+            </a:r>
+            <a:r>
+              <a:rPr kumimoji="0" lang="az-Latn-AZ" altLang="en-US" sz="1300" b="0" i="0" u="none" strike="noStrike" cap="none" normalizeH="0" baseline="0">
+                <a:ln>
+                  <a:noFill/>
+                </a:ln>
+                <a:solidFill>
+                  <a:schemeClr val="tx1"/>
+                </a:solidFill>
+                <a:effectLst/>
+                <a:latin typeface="Arial" panose="020B0604020202020204" pitchFamily="34" charset="0"/>
+              </a:rPr>
+              <a:t> -ları özümüz </a:t>
+            </a:r>
+            <a:r>
+              <a:rPr kumimoji="0" lang="az-Latn-AZ" altLang="en-US" sz="1300" b="1" i="0" u="none" strike="noStrike" cap="none" normalizeH="0" baseline="0">
+                <a:ln>
+                  <a:noFill/>
+                </a:ln>
+                <a:solidFill>
+                  <a:schemeClr val="tx1"/>
+                </a:solidFill>
+                <a:effectLst/>
+                <a:latin typeface="Arial" panose="020B0604020202020204" pitchFamily="34" charset="0"/>
+              </a:rPr>
+              <a:t>manual</a:t>
+            </a:r>
+            <a:r>
+              <a:rPr kumimoji="0" lang="az-Latn-AZ" altLang="en-US" sz="1300" b="0" i="0" u="none" strike="noStrike" cap="none" normalizeH="0" baseline="0">
+                <a:ln>
+                  <a:noFill/>
+                </a:ln>
+                <a:solidFill>
+                  <a:schemeClr val="tx1"/>
+                </a:solidFill>
+                <a:effectLst/>
+                <a:latin typeface="Arial" panose="020B0604020202020204" pitchFamily="34" charset="0"/>
+              </a:rPr>
+              <a:t> olaraq əlavə etməliyik </a:t>
+            </a:r>
+            <a:r>
+              <a:rPr kumimoji="0" lang="en-US" altLang="en-US" sz="1300" b="1" i="0" u="none" strike="noStrike" cap="none" normalizeH="0" baseline="0">
+                <a:ln>
+                  <a:noFill/>
+                </a:ln>
+                <a:solidFill>
+                  <a:schemeClr val="tx1"/>
+                </a:solidFill>
+                <a:effectLst/>
+                <a:latin typeface="Arial" panose="020B0604020202020204" pitchFamily="34" charset="0"/>
+              </a:rPr>
+              <a:t>web.php </a:t>
+            </a:r>
+            <a:r>
+              <a:rPr kumimoji="0" lang="az-Latn-AZ" altLang="en-US" sz="1300" b="0" i="0" u="none" strike="noStrike" cap="none" normalizeH="0" baseline="0">
+                <a:ln>
+                  <a:noFill/>
+                </a:ln>
+                <a:solidFill>
+                  <a:schemeClr val="tx1"/>
+                </a:solidFill>
+                <a:effectLst/>
+                <a:latin typeface="Arial" panose="020B0604020202020204" pitchFamily="34" charset="0"/>
+              </a:rPr>
+              <a:t>faylına (növbəti slayd) . </a:t>
+            </a:r>
+            <a:endParaRPr kumimoji="0" lang="en-US" altLang="en-US" sz="1300" b="0" i="0" u="none" strike="noStrike" cap="none" normalizeH="0" baseline="0">
+              <a:ln>
+                <a:noFill/>
+              </a:ln>
+              <a:solidFill>
+                <a:schemeClr val="tx1"/>
+              </a:solidFill>
+              <a:effectLst/>
+              <a:latin typeface="Arial" panose="020B0604020202020204" pitchFamily="34" charset="0"/>
+            </a:endParaRPr>
+          </a:p>
+        </p:txBody>
+      </p:sp>
+      <p:pic>
+        <p:nvPicPr>
+          <p:cNvPr id="6" name="Picture 5">
+            <a:extLst>
+              <a:ext uri="{FF2B5EF4-FFF2-40B4-BE49-F238E27FC236}">
+                <a16:creationId xmlns:a16="http://schemas.microsoft.com/office/drawing/2014/main" id="{B00BEB9D-F5ED-5F2E-9A7F-979053776D19}"/>
+              </a:ext>
+            </a:extLst>
+          </p:cNvPr>
+          <p:cNvPicPr>
+            <a:picLocks noChangeAspect="1"/>
+          </p:cNvPicPr>
+          <p:nvPr/>
+        </p:nvPicPr>
+        <p:blipFill>
+          <a:blip r:embed="rId2"/>
+          <a:stretch>
+            <a:fillRect/>
+          </a:stretch>
+        </p:blipFill>
+        <p:spPr>
+          <a:xfrm>
+            <a:off x="0" y="1951478"/>
+            <a:ext cx="12192000" cy="2955043"/>
+          </a:xfrm>
+          <a:prstGeom prst="rect">
+            <a:avLst/>
+          </a:prstGeom>
+        </p:spPr>
+      </p:pic>
     </p:spTree>
     <p:extLst>
       <p:ext uri="{BB962C8B-B14F-4D97-AF65-F5344CB8AC3E}">
@@ -3571,6 +4341,1057 @@
 </file>
 
 <file path=ppt/slides/slide4.xml><?xml version="1.0" encoding="utf-8"?>
+<p:sld xmlns:a="http://schemas.openxmlformats.org/drawingml/2006/main" xmlns:r="http://schemas.openxmlformats.org/officeDocument/2006/relationships" xmlns:p="http://schemas.openxmlformats.org/presentationml/2006/main">
+  <p:cSld>
+    <p:spTree>
+      <p:nvGrpSpPr>
+        <p:cNvPr id="1" name="">
+          <a:extLst>
+            <a:ext uri="{FF2B5EF4-FFF2-40B4-BE49-F238E27FC236}">
+              <a16:creationId xmlns:a16="http://schemas.microsoft.com/office/drawing/2014/main" id="{8F6677F6-C13E-FCA0-68B5-73E547EA600A}"/>
+            </a:ext>
+          </a:extLst>
+        </p:cNvPr>
+        <p:cNvGrpSpPr/>
+        <p:nvPr/>
+      </p:nvGrpSpPr>
+      <p:grpSpPr>
+        <a:xfrm>
+          <a:off x="0" y="0"/>
+          <a:ext cx="0" cy="0"/>
+          <a:chOff x="0" y="0"/>
+          <a:chExt cx="0" cy="0"/>
+        </a:xfrm>
+      </p:grpSpPr>
+      <p:sp>
+        <p:nvSpPr>
+          <p:cNvPr id="3" name="TextBox 2">
+            <a:extLst>
+              <a:ext uri="{FF2B5EF4-FFF2-40B4-BE49-F238E27FC236}">
+                <a16:creationId xmlns:a16="http://schemas.microsoft.com/office/drawing/2014/main" id="{F2D67AA0-DB24-D937-BE2D-1707BEAE0265}"/>
+              </a:ext>
+            </a:extLst>
+          </p:cNvPr>
+          <p:cNvSpPr txBox="1"/>
+          <p:nvPr/>
+        </p:nvSpPr>
+        <p:spPr>
+          <a:xfrm>
+            <a:off x="217714" y="255046"/>
+            <a:ext cx="11756571" cy="984308"/>
+          </a:xfrm>
+          <a:prstGeom prst="rect">
+            <a:avLst/>
+          </a:prstGeom>
+          <a:noFill/>
+        </p:spPr>
+        <p:txBody>
+          <a:bodyPr wrap="square">
+            <a:spAutoFit/>
+          </a:bodyPr>
+          <a:lstStyle/>
+          <a:p>
+            <a:pPr>
+              <a:lnSpc>
+                <a:spcPct val="150000"/>
+              </a:lnSpc>
+              <a:buNone/>
+            </a:pPr>
+            <a:r>
+              <a:rPr lang="en-US" altLang="en-US" sz="1100" b="1">
+                <a:latin typeface="Arial" panose="020B0604020202020204" pitchFamily="34" charset="0"/>
+              </a:rPr>
+              <a:t>Route</a:t>
+            </a:r>
+            <a:r>
+              <a:rPr lang="en-US" altLang="en-US" sz="1100">
+                <a:latin typeface="Arial" panose="020B0604020202020204" pitchFamily="34" charset="0"/>
+              </a:rPr>
+              <a:t> </a:t>
+            </a:r>
+            <a:r>
+              <a:rPr lang="az-Latn-AZ" altLang="en-US" sz="1100">
+                <a:latin typeface="Arial" panose="020B0604020202020204" pitchFamily="34" charset="0"/>
+              </a:rPr>
+              <a:t>əlavə etdikdən sonra artıq siyahıda həmin </a:t>
+            </a:r>
+            <a:r>
+              <a:rPr lang="az-Latn-AZ" altLang="en-US" sz="1100" b="1">
+                <a:latin typeface="Arial" panose="020B0604020202020204" pitchFamily="34" charset="0"/>
+              </a:rPr>
+              <a:t>route</a:t>
+            </a:r>
+            <a:r>
+              <a:rPr lang="az-Latn-AZ" altLang="en-US" sz="1100">
+                <a:latin typeface="Arial" panose="020B0604020202020204" pitchFamily="34" charset="0"/>
+              </a:rPr>
+              <a:t> -u görə bilərik.</a:t>
+            </a:r>
+            <a:endParaRPr lang="en-US" altLang="en-US" sz="1100">
+              <a:latin typeface="Arial" panose="020B0604020202020204" pitchFamily="34" charset="0"/>
+            </a:endParaRPr>
+          </a:p>
+          <a:p>
+            <a:pPr>
+              <a:lnSpc>
+                <a:spcPct val="150000"/>
+              </a:lnSpc>
+              <a:buNone/>
+            </a:pPr>
+            <a:endParaRPr kumimoji="0" lang="en-US" altLang="en-US" sz="600" b="0" i="0" u="none" strike="noStrike" cap="none" normalizeH="0" baseline="0">
+              <a:ln>
+                <a:noFill/>
+              </a:ln>
+              <a:solidFill>
+                <a:schemeClr val="tx1"/>
+              </a:solidFill>
+              <a:effectLst/>
+              <a:latin typeface="Arial" panose="020B0604020202020204" pitchFamily="34" charset="0"/>
+            </a:endParaRPr>
+          </a:p>
+          <a:p>
+            <a:pPr>
+              <a:lnSpc>
+                <a:spcPct val="150000"/>
+              </a:lnSpc>
+              <a:buNone/>
+            </a:pPr>
+            <a:r>
+              <a:rPr lang="az-Latn-AZ" altLang="en-US" sz="1100">
+                <a:latin typeface="Arial" panose="020B0604020202020204" pitchFamily="34" charset="0"/>
+              </a:rPr>
+              <a:t>Hal-hazırda bu route -da bir səhf var. Ancaq hələki </a:t>
+            </a:r>
+            <a:r>
+              <a:rPr lang="az-Latn-AZ" altLang="en-US" sz="1100" b="1">
+                <a:latin typeface="Arial" panose="020B0604020202020204" pitchFamily="34" charset="0"/>
+              </a:rPr>
+              <a:t>index.blade.php </a:t>
+            </a:r>
+            <a:r>
+              <a:rPr lang="az-Latn-AZ" altLang="en-US" sz="1100">
+                <a:latin typeface="Arial" panose="020B0604020202020204" pitchFamily="34" charset="0"/>
+              </a:rPr>
+              <a:t>faylını, </a:t>
+            </a:r>
+            <a:r>
+              <a:rPr lang="az-Latn-AZ" altLang="en-US" sz="1100" b="1">
+                <a:latin typeface="Arial" panose="020B0604020202020204" pitchFamily="34" charset="0"/>
+              </a:rPr>
+              <a:t>trashed.blade.php </a:t>
+            </a:r>
+            <a:r>
+              <a:rPr lang="az-Latn-AZ" altLang="en-US" sz="1100">
+                <a:latin typeface="Arial" panose="020B0604020202020204" pitchFamily="34" charset="0"/>
+              </a:rPr>
+              <a:t>faylına copy past edək. Sonra </a:t>
+            </a:r>
+            <a:r>
+              <a:rPr lang="az-Latn-AZ" altLang="en-US" sz="1100" b="1">
+                <a:latin typeface="Arial" panose="020B0604020202020204" pitchFamily="34" charset="0"/>
+              </a:rPr>
+              <a:t>controlleri</a:t>
+            </a:r>
+            <a:r>
+              <a:rPr lang="az-Latn-AZ" altLang="en-US" sz="1100">
+                <a:latin typeface="Arial" panose="020B0604020202020204" pitchFamily="34" charset="0"/>
+              </a:rPr>
+              <a:t> -idə </a:t>
+            </a:r>
+            <a:r>
+              <a:rPr lang="az-Latn-AZ" altLang="en-US" sz="1100" b="1">
+                <a:latin typeface="Arial" panose="020B0604020202020204" pitchFamily="34" charset="0"/>
+              </a:rPr>
+              <a:t>yazaraq</a:t>
+            </a:r>
+            <a:r>
+              <a:rPr lang="az-Latn-AZ" altLang="en-US" sz="1100">
+                <a:latin typeface="Arial" panose="020B0604020202020204" pitchFamily="34" charset="0"/>
+              </a:rPr>
+              <a:t> Trashed şablonuna daxil olmağa çalışaq onda sonra həmin səhifənin nə olduğunu deyəcəm.</a:t>
+            </a:r>
+            <a:endParaRPr kumimoji="0" lang="en-US" altLang="en-US" sz="1100" b="0" i="0" u="none" strike="noStrike" cap="none" normalizeH="0" baseline="0">
+              <a:ln>
+                <a:noFill/>
+              </a:ln>
+              <a:solidFill>
+                <a:schemeClr val="tx1"/>
+              </a:solidFill>
+              <a:effectLst/>
+              <a:latin typeface="Arial" panose="020B0604020202020204" pitchFamily="34" charset="0"/>
+            </a:endParaRPr>
+          </a:p>
+        </p:txBody>
+      </p:sp>
+      <p:pic>
+        <p:nvPicPr>
+          <p:cNvPr id="4" name="Picture 3">
+            <a:extLst>
+              <a:ext uri="{FF2B5EF4-FFF2-40B4-BE49-F238E27FC236}">
+                <a16:creationId xmlns:a16="http://schemas.microsoft.com/office/drawing/2014/main" id="{9E536A13-5A2B-A28B-682D-3924C8D4C9BB}"/>
+              </a:ext>
+            </a:extLst>
+          </p:cNvPr>
+          <p:cNvPicPr>
+            <a:picLocks noChangeAspect="1"/>
+          </p:cNvPicPr>
+          <p:nvPr/>
+        </p:nvPicPr>
+        <p:blipFill>
+          <a:blip r:embed="rId2"/>
+          <a:stretch>
+            <a:fillRect/>
+          </a:stretch>
+        </p:blipFill>
+        <p:spPr>
+          <a:xfrm>
+            <a:off x="-1" y="1313181"/>
+            <a:ext cx="12192000" cy="5544819"/>
+          </a:xfrm>
+          <a:prstGeom prst="rect">
+            <a:avLst/>
+          </a:prstGeom>
+        </p:spPr>
+      </p:pic>
+    </p:spTree>
+    <p:extLst>
+      <p:ext uri="{BB962C8B-B14F-4D97-AF65-F5344CB8AC3E}">
+        <p14:creationId xmlns:p14="http://schemas.microsoft.com/office/powerpoint/2010/main" val="1270286606"/>
+      </p:ext>
+    </p:extLst>
+  </p:cSld>
+  <p:clrMapOvr>
+    <a:masterClrMapping/>
+  </p:clrMapOvr>
+</p:sld>
+</file>
+
+<file path=ppt/slides/slide5.xml><?xml version="1.0" encoding="utf-8"?>
+<p:sld xmlns:a="http://schemas.openxmlformats.org/drawingml/2006/main" xmlns:r="http://schemas.openxmlformats.org/officeDocument/2006/relationships" xmlns:p="http://schemas.openxmlformats.org/presentationml/2006/main">
+  <p:cSld>
+    <p:spTree>
+      <p:nvGrpSpPr>
+        <p:cNvPr id="1" name="">
+          <a:extLst>
+            <a:ext uri="{FF2B5EF4-FFF2-40B4-BE49-F238E27FC236}">
+              <a16:creationId xmlns:a16="http://schemas.microsoft.com/office/drawing/2014/main" id="{E1FB3F57-D2A3-9431-07A6-FB101D86461B}"/>
+            </a:ext>
+          </a:extLst>
+        </p:cNvPr>
+        <p:cNvGrpSpPr/>
+        <p:nvPr/>
+      </p:nvGrpSpPr>
+      <p:grpSpPr>
+        <a:xfrm>
+          <a:off x="0" y="0"/>
+          <a:ext cx="0" cy="0"/>
+          <a:chOff x="0" y="0"/>
+          <a:chExt cx="0" cy="0"/>
+        </a:xfrm>
+      </p:grpSpPr>
+      <p:sp>
+        <p:nvSpPr>
+          <p:cNvPr id="3" name="TextBox 2">
+            <a:extLst>
+              <a:ext uri="{FF2B5EF4-FFF2-40B4-BE49-F238E27FC236}">
+                <a16:creationId xmlns:a16="http://schemas.microsoft.com/office/drawing/2014/main" id="{E99C9B9A-8691-AD41-8BFE-A57793636B38}"/>
+              </a:ext>
+            </a:extLst>
+          </p:cNvPr>
+          <p:cNvSpPr txBox="1"/>
+          <p:nvPr/>
+        </p:nvSpPr>
+        <p:spPr>
+          <a:xfrm>
+            <a:off x="217714" y="255046"/>
+            <a:ext cx="11756571" cy="1555682"/>
+          </a:xfrm>
+          <a:prstGeom prst="rect">
+            <a:avLst/>
+          </a:prstGeom>
+          <a:noFill/>
+        </p:spPr>
+        <p:txBody>
+          <a:bodyPr wrap="square">
+            <a:spAutoFit/>
+          </a:bodyPr>
+          <a:lstStyle/>
+          <a:p>
+            <a:pPr marL="342900" indent="-342900">
+              <a:lnSpc>
+                <a:spcPct val="150000"/>
+              </a:lnSpc>
+              <a:buAutoNum type="arabicParenR"/>
+            </a:pPr>
+            <a:r>
+              <a:rPr lang="en-US" altLang="en-US" sz="1300" b="1">
+                <a:latin typeface="Arial" panose="020B0604020202020204" pitchFamily="34" charset="0"/>
+              </a:rPr>
+              <a:t>index.blade.php </a:t>
+            </a:r>
+            <a:r>
+              <a:rPr lang="en-US" altLang="en-US" sz="1300">
+                <a:latin typeface="Arial" panose="020B0604020202020204" pitchFamily="34" charset="0"/>
+              </a:rPr>
+              <a:t>fayl</a:t>
+            </a:r>
+            <a:r>
+              <a:rPr lang="az-Latn-AZ" altLang="en-US" sz="1300">
+                <a:latin typeface="Arial" panose="020B0604020202020204" pitchFamily="34" charset="0"/>
+              </a:rPr>
+              <a:t>ında </a:t>
+            </a:r>
+            <a:r>
+              <a:rPr lang="en-US" altLang="en-US" sz="1300" b="1">
+                <a:latin typeface="Arial" panose="020B0604020202020204" pitchFamily="34" charset="0"/>
+              </a:rPr>
+              <a:t>&lt;a&gt;</a:t>
+            </a:r>
+            <a:r>
+              <a:rPr lang="az-Latn-AZ" altLang="en-US" sz="1300">
+                <a:latin typeface="Arial" panose="020B0604020202020204" pitchFamily="34" charset="0"/>
+              </a:rPr>
+              <a:t> tag -inə link veririk</a:t>
+            </a:r>
+          </a:p>
+          <a:p>
+            <a:pPr marL="342900" indent="-342900">
+              <a:lnSpc>
+                <a:spcPct val="150000"/>
+              </a:lnSpc>
+              <a:buAutoNum type="arabicParenR"/>
+            </a:pPr>
+            <a:r>
+              <a:rPr kumimoji="0" lang="en-US" altLang="en-US" sz="1300" b="1" i="0" u="none" strike="noStrike" cap="none" normalizeH="0" baseline="0">
+                <a:ln>
+                  <a:noFill/>
+                </a:ln>
+                <a:solidFill>
+                  <a:schemeClr val="tx1"/>
+                </a:solidFill>
+                <a:effectLst/>
+                <a:latin typeface="Arial" panose="020B0604020202020204" pitchFamily="34" charset="0"/>
+              </a:rPr>
+              <a:t>&lt;a&gt;</a:t>
+            </a:r>
+            <a:r>
+              <a:rPr kumimoji="0" lang="en-US" altLang="en-US" sz="1300" b="0" i="0" u="none" strike="noStrike" cap="none" normalizeH="0" baseline="0">
+                <a:ln>
+                  <a:noFill/>
+                </a:ln>
+                <a:solidFill>
+                  <a:schemeClr val="tx1"/>
+                </a:solidFill>
+                <a:effectLst/>
+                <a:latin typeface="Arial" panose="020B0604020202020204" pitchFamily="34" charset="0"/>
+              </a:rPr>
+              <a:t> </a:t>
+            </a:r>
+            <a:r>
+              <a:rPr kumimoji="0" lang="az-Latn-AZ" altLang="en-US" sz="1300" b="0" i="0" u="none" strike="noStrike" cap="none" normalizeH="0" baseline="0">
+                <a:ln>
+                  <a:noFill/>
+                </a:ln>
+                <a:solidFill>
+                  <a:schemeClr val="tx1"/>
+                </a:solidFill>
+                <a:effectLst/>
+                <a:latin typeface="Arial" panose="020B0604020202020204" pitchFamily="34" charset="0"/>
+              </a:rPr>
+              <a:t>tag -I klikləndikdə </a:t>
+            </a:r>
+            <a:r>
+              <a:rPr lang="az-Latn-AZ" altLang="en-US" sz="1300" b="1">
+                <a:latin typeface="Arial" panose="020B0604020202020204" pitchFamily="34" charset="0"/>
+              </a:rPr>
+              <a:t>PostController</a:t>
+            </a:r>
+            <a:r>
+              <a:rPr lang="az-Latn-AZ" altLang="en-US" sz="1300">
+                <a:latin typeface="Arial" panose="020B0604020202020204" pitchFamily="34" charset="0"/>
+              </a:rPr>
+              <a:t> -dəki, </a:t>
+            </a:r>
+            <a:r>
+              <a:rPr lang="az-Latn-AZ" altLang="en-US" sz="1300" b="1">
+                <a:latin typeface="Arial" panose="020B0604020202020204" pitchFamily="34" charset="0"/>
+              </a:rPr>
+              <a:t>trashed() </a:t>
+            </a:r>
+            <a:r>
+              <a:rPr lang="az-Latn-AZ" altLang="en-US" sz="1300">
+                <a:latin typeface="Arial" panose="020B0604020202020204" pitchFamily="34" charset="0"/>
+              </a:rPr>
+              <a:t>funksiyası çağrılır. </a:t>
+            </a:r>
+          </a:p>
+          <a:p>
+            <a:pPr marL="342900" indent="-342900">
+              <a:lnSpc>
+                <a:spcPct val="150000"/>
+              </a:lnSpc>
+              <a:buAutoNum type="arabicParenR"/>
+            </a:pPr>
+            <a:r>
+              <a:rPr lang="az-Latn-AZ" altLang="en-US" sz="1300">
+                <a:latin typeface="Arial" panose="020B0604020202020204" pitchFamily="34" charset="0"/>
+              </a:rPr>
+              <a:t>Ekranda `</a:t>
+            </a:r>
+            <a:r>
+              <a:rPr lang="en-US" altLang="en-US" sz="1300" b="1">
+                <a:latin typeface="Arial" panose="020B0604020202020204" pitchFamily="34" charset="0"/>
+              </a:rPr>
+              <a:t>Hello World</a:t>
+            </a:r>
+            <a:r>
+              <a:rPr lang="az-Latn-AZ" altLang="en-US" sz="1300">
+                <a:latin typeface="Arial" panose="020B0604020202020204" pitchFamily="34" charset="0"/>
+              </a:rPr>
+              <a:t>`</a:t>
+            </a:r>
+            <a:r>
+              <a:rPr lang="en-US" altLang="en-US" sz="1300">
+                <a:latin typeface="Arial" panose="020B0604020202020204" pitchFamily="34" charset="0"/>
+              </a:rPr>
+              <a:t> </a:t>
+            </a:r>
+            <a:r>
+              <a:rPr lang="az-Latn-AZ" altLang="en-US" sz="1300">
+                <a:latin typeface="Arial" panose="020B0604020202020204" pitchFamily="34" charset="0"/>
+              </a:rPr>
+              <a:t>yazısı görsənməlidir</a:t>
+            </a:r>
+          </a:p>
+          <a:p>
+            <a:pPr marL="342900" indent="-342900">
+              <a:lnSpc>
+                <a:spcPct val="150000"/>
+              </a:lnSpc>
+              <a:buAutoNum type="arabicParenR"/>
+            </a:pPr>
+            <a:r>
+              <a:rPr kumimoji="0" lang="az-Latn-AZ" altLang="en-US" sz="1300" b="0" i="0" u="none" strike="noStrike" cap="none" normalizeH="0" baseline="0">
+                <a:ln>
+                  <a:noFill/>
+                </a:ln>
+                <a:solidFill>
+                  <a:schemeClr val="tx1"/>
+                </a:solidFill>
+                <a:effectLst/>
+                <a:latin typeface="Arial" panose="020B0604020202020204" pitchFamily="34" charset="0"/>
+              </a:rPr>
+              <a:t>Ancaq `</a:t>
+            </a:r>
+            <a:r>
+              <a:rPr kumimoji="0" lang="az-Latn-AZ" altLang="en-US" sz="1300" b="1" i="0" u="none" strike="noStrike" cap="none" normalizeH="0" baseline="0">
+                <a:ln>
+                  <a:noFill/>
+                </a:ln>
+                <a:solidFill>
+                  <a:schemeClr val="tx1"/>
+                </a:solidFill>
+                <a:effectLst/>
+                <a:latin typeface="Arial" panose="020B0604020202020204" pitchFamily="34" charset="0"/>
+              </a:rPr>
+              <a:t>404 </a:t>
+            </a:r>
+            <a:r>
+              <a:rPr kumimoji="0" lang="en-US" altLang="en-US" sz="1300" b="1" i="0" u="none" strike="noStrike" cap="none" normalizeH="0" baseline="0">
+                <a:ln>
+                  <a:noFill/>
+                </a:ln>
+                <a:solidFill>
+                  <a:schemeClr val="tx1"/>
+                </a:solidFill>
+                <a:effectLst/>
+                <a:latin typeface="Arial" panose="020B0604020202020204" pitchFamily="34" charset="0"/>
+              </a:rPr>
+              <a:t>Not Found</a:t>
+            </a:r>
+            <a:r>
+              <a:rPr kumimoji="0" lang="az-Latn-AZ" altLang="en-US" sz="1300" b="0" i="0" u="none" strike="noStrike" cap="none" normalizeH="0" baseline="0">
+                <a:ln>
+                  <a:noFill/>
+                </a:ln>
+                <a:solidFill>
+                  <a:schemeClr val="tx1"/>
+                </a:solidFill>
+                <a:effectLst/>
+                <a:latin typeface="Arial" panose="020B0604020202020204" pitchFamily="34" charset="0"/>
+              </a:rPr>
+              <a:t>`</a:t>
+            </a:r>
+            <a:r>
+              <a:rPr kumimoji="0" lang="en-US" altLang="en-US" sz="1300" b="0" i="0" u="none" strike="noStrike" cap="none" normalizeH="0" baseline="0">
+                <a:ln>
+                  <a:noFill/>
+                </a:ln>
+                <a:solidFill>
+                  <a:schemeClr val="tx1"/>
+                </a:solidFill>
+                <a:effectLst/>
+                <a:latin typeface="Arial" panose="020B0604020202020204" pitchFamily="34" charset="0"/>
+              </a:rPr>
+              <a:t> </a:t>
+            </a:r>
+            <a:r>
+              <a:rPr kumimoji="0" lang="az-Latn-AZ" altLang="en-US" sz="1300" b="0" i="0" u="none" strike="noStrike" cap="none" normalizeH="0" baseline="0">
+                <a:ln>
+                  <a:noFill/>
+                </a:ln>
+                <a:solidFill>
+                  <a:schemeClr val="tx1"/>
+                </a:solidFill>
+                <a:effectLst/>
+                <a:latin typeface="Arial" panose="020B0604020202020204" pitchFamily="34" charset="0"/>
+              </a:rPr>
+              <a:t>mesajı görəcəyik. </a:t>
+            </a:r>
+          </a:p>
+          <a:p>
+            <a:pPr marL="342900" indent="-342900">
+              <a:lnSpc>
+                <a:spcPct val="150000"/>
+              </a:lnSpc>
+              <a:buAutoNum type="arabicParenR"/>
+            </a:pPr>
+            <a:r>
+              <a:rPr lang="az-Latn-AZ" altLang="en-US" sz="1300">
+                <a:latin typeface="Arial" panose="020B0604020202020204" pitchFamily="34" charset="0"/>
+              </a:rPr>
+              <a:t>Ardı növbəti slaydda.....</a:t>
+            </a:r>
+            <a:endParaRPr kumimoji="0" lang="az-Latn-AZ" altLang="en-US" sz="1300" b="0" i="0" u="none" strike="noStrike" cap="none" normalizeH="0" baseline="0">
+              <a:ln>
+                <a:noFill/>
+              </a:ln>
+              <a:solidFill>
+                <a:schemeClr val="tx1"/>
+              </a:solidFill>
+              <a:effectLst/>
+              <a:latin typeface="Arial" panose="020B0604020202020204" pitchFamily="34" charset="0"/>
+            </a:endParaRPr>
+          </a:p>
+        </p:txBody>
+      </p:sp>
+      <p:pic>
+        <p:nvPicPr>
+          <p:cNvPr id="4" name="Picture 3">
+            <a:extLst>
+              <a:ext uri="{FF2B5EF4-FFF2-40B4-BE49-F238E27FC236}">
+                <a16:creationId xmlns:a16="http://schemas.microsoft.com/office/drawing/2014/main" id="{632B1BCE-2DB9-1E6C-B895-44BBECC2D6BB}"/>
+              </a:ext>
+            </a:extLst>
+          </p:cNvPr>
+          <p:cNvPicPr>
+            <a:picLocks noChangeAspect="1"/>
+          </p:cNvPicPr>
+          <p:nvPr/>
+        </p:nvPicPr>
+        <p:blipFill>
+          <a:blip r:embed="rId2"/>
+          <a:stretch>
+            <a:fillRect/>
+          </a:stretch>
+        </p:blipFill>
+        <p:spPr>
+          <a:xfrm>
+            <a:off x="0" y="1998026"/>
+            <a:ext cx="12192000" cy="4859974"/>
+          </a:xfrm>
+          <a:prstGeom prst="rect">
+            <a:avLst/>
+          </a:prstGeom>
+        </p:spPr>
+      </p:pic>
+    </p:spTree>
+    <p:extLst>
+      <p:ext uri="{BB962C8B-B14F-4D97-AF65-F5344CB8AC3E}">
+        <p14:creationId xmlns:p14="http://schemas.microsoft.com/office/powerpoint/2010/main" val="1645063547"/>
+      </p:ext>
+    </p:extLst>
+  </p:cSld>
+  <p:clrMapOvr>
+    <a:masterClrMapping/>
+  </p:clrMapOvr>
+</p:sld>
+</file>
+
+<file path=ppt/slides/slide6.xml><?xml version="1.0" encoding="utf-8"?>
+<p:sld xmlns:a="http://schemas.openxmlformats.org/drawingml/2006/main" xmlns:r="http://schemas.openxmlformats.org/officeDocument/2006/relationships" xmlns:p="http://schemas.openxmlformats.org/presentationml/2006/main">
+  <p:cSld>
+    <p:spTree>
+      <p:nvGrpSpPr>
+        <p:cNvPr id="1" name="">
+          <a:extLst>
+            <a:ext uri="{FF2B5EF4-FFF2-40B4-BE49-F238E27FC236}">
+              <a16:creationId xmlns:a16="http://schemas.microsoft.com/office/drawing/2014/main" id="{A11D52EB-37D7-717F-CB7D-F0241E4C70F9}"/>
+            </a:ext>
+          </a:extLst>
+        </p:cNvPr>
+        <p:cNvGrpSpPr/>
+        <p:nvPr/>
+      </p:nvGrpSpPr>
+      <p:grpSpPr>
+        <a:xfrm>
+          <a:off x="0" y="0"/>
+          <a:ext cx="0" cy="0"/>
+          <a:chOff x="0" y="0"/>
+          <a:chExt cx="0" cy="0"/>
+        </a:xfrm>
+      </p:grpSpPr>
+      <p:sp>
+        <p:nvSpPr>
+          <p:cNvPr id="3" name="TextBox 2">
+            <a:extLst>
+              <a:ext uri="{FF2B5EF4-FFF2-40B4-BE49-F238E27FC236}">
+                <a16:creationId xmlns:a16="http://schemas.microsoft.com/office/drawing/2014/main" id="{16E5C37B-9F1C-C9D4-97CF-A07DA623E3CD}"/>
+              </a:ext>
+            </a:extLst>
+          </p:cNvPr>
+          <p:cNvSpPr txBox="1"/>
+          <p:nvPr/>
+        </p:nvSpPr>
+        <p:spPr>
+          <a:xfrm>
+            <a:off x="217714" y="255046"/>
+            <a:ext cx="11756571" cy="955518"/>
+          </a:xfrm>
+          <a:prstGeom prst="rect">
+            <a:avLst/>
+          </a:prstGeom>
+          <a:noFill/>
+        </p:spPr>
+        <p:txBody>
+          <a:bodyPr wrap="square">
+            <a:spAutoFit/>
+          </a:bodyPr>
+          <a:lstStyle/>
+          <a:p>
+            <a:pPr>
+              <a:lnSpc>
+                <a:spcPct val="150000"/>
+              </a:lnSpc>
+            </a:pPr>
+            <a:r>
+              <a:rPr kumimoji="0" lang="az-Latn-AZ" altLang="en-US" sz="1300" b="0" i="0" u="none" strike="noStrike" cap="none" normalizeH="0" baseline="0">
+                <a:ln>
+                  <a:noFill/>
+                </a:ln>
+                <a:solidFill>
+                  <a:schemeClr val="tx1"/>
+                </a:solidFill>
+                <a:effectLst/>
+                <a:latin typeface="Arial" panose="020B0604020202020204" pitchFamily="34" charset="0"/>
+              </a:rPr>
+              <a:t>6) </a:t>
+            </a:r>
+            <a:r>
+              <a:rPr lang="az-Latn-AZ" altLang="en-US" sz="1300">
+                <a:latin typeface="Arial" panose="020B0604020202020204" pitchFamily="34" charset="0"/>
+              </a:rPr>
+              <a:t>Bunun səbəbi </a:t>
+            </a:r>
+            <a:r>
+              <a:rPr lang="en-US" altLang="en-US" sz="1300">
+                <a:latin typeface="Arial" panose="020B0604020202020204" pitchFamily="34" charset="0"/>
+              </a:rPr>
+              <a:t>`</a:t>
+            </a:r>
+            <a:r>
+              <a:rPr lang="en-US" altLang="en-US" sz="1300" b="1">
+                <a:latin typeface="Arial" panose="020B0604020202020204" pitchFamily="34" charset="0"/>
+              </a:rPr>
+              <a:t>web.php</a:t>
+            </a:r>
+            <a:r>
+              <a:rPr lang="en-US" altLang="en-US" sz="1300">
+                <a:latin typeface="Arial" panose="020B0604020202020204" pitchFamily="34" charset="0"/>
+              </a:rPr>
+              <a:t>` fayl</a:t>
+            </a:r>
+            <a:r>
+              <a:rPr lang="az-Latn-AZ" altLang="en-US" sz="1300">
+                <a:latin typeface="Arial" panose="020B0604020202020204" pitchFamily="34" charset="0"/>
+              </a:rPr>
+              <a:t>ındakı, </a:t>
+            </a:r>
+            <a:r>
+              <a:rPr lang="az-Latn-AZ" altLang="en-US" sz="1300" b="1">
+                <a:latin typeface="Arial" panose="020B0604020202020204" pitchFamily="34" charset="0"/>
+              </a:rPr>
+              <a:t>`/posts/trash</a:t>
+            </a:r>
+            <a:r>
+              <a:rPr lang="az-Latn-AZ" altLang="en-US" sz="1300">
+                <a:latin typeface="Arial" panose="020B0604020202020204" pitchFamily="34" charset="0"/>
+              </a:rPr>
+              <a:t>` route -runun, `</a:t>
+            </a:r>
+            <a:r>
+              <a:rPr lang="en-US" altLang="en-US" sz="1300" b="1">
+                <a:latin typeface="Arial" panose="020B0604020202020204" pitchFamily="34" charset="0"/>
+              </a:rPr>
+              <a:t>Route::resource('posts', PostController::class);</a:t>
+            </a:r>
+            <a:r>
+              <a:rPr lang="az-Latn-AZ" altLang="en-US" sz="1300">
+                <a:latin typeface="Arial" panose="020B0604020202020204" pitchFamily="34" charset="0"/>
+              </a:rPr>
+              <a:t>` route -rundan sonra yazılması idi. Onun üçün həmin route -ru yuxarı çıxarmaq lazımdır. Əks halda, aşağı sağ şəkildəki kimi  `</a:t>
+            </a:r>
+            <a:r>
+              <a:rPr kumimoji="0" lang="az-Latn-AZ" altLang="en-US" sz="1300" b="1" i="0" u="none" strike="noStrike" cap="none" normalizeH="0" baseline="0">
+                <a:ln>
+                  <a:noFill/>
+                </a:ln>
+                <a:solidFill>
+                  <a:schemeClr val="tx1"/>
+                </a:solidFill>
+                <a:effectLst/>
+                <a:latin typeface="Arial" panose="020B0604020202020204" pitchFamily="34" charset="0"/>
+              </a:rPr>
+              <a:t>404 </a:t>
+            </a:r>
+            <a:r>
+              <a:rPr kumimoji="0" lang="en-US" altLang="en-US" sz="1300" b="1" i="0" u="none" strike="noStrike" cap="none" normalizeH="0" baseline="0">
+                <a:ln>
+                  <a:noFill/>
+                </a:ln>
+                <a:solidFill>
+                  <a:schemeClr val="tx1"/>
+                </a:solidFill>
+                <a:effectLst/>
+                <a:latin typeface="Arial" panose="020B0604020202020204" pitchFamily="34" charset="0"/>
+              </a:rPr>
+              <a:t>Not Found</a:t>
+            </a:r>
+            <a:r>
+              <a:rPr kumimoji="0" lang="az-Latn-AZ" altLang="en-US" sz="1300" b="0" i="0" u="none" strike="noStrike" cap="none" normalizeH="0" baseline="0">
+                <a:ln>
+                  <a:noFill/>
+                </a:ln>
+                <a:solidFill>
+                  <a:schemeClr val="tx1"/>
+                </a:solidFill>
+                <a:effectLst/>
+                <a:latin typeface="Arial" panose="020B0604020202020204" pitchFamily="34" charset="0"/>
+              </a:rPr>
+              <a:t>`</a:t>
+            </a:r>
+            <a:r>
+              <a:rPr kumimoji="0" lang="en-US" altLang="en-US" sz="1300" b="0" i="0" u="none" strike="noStrike" cap="none" normalizeH="0" baseline="0">
+                <a:ln>
+                  <a:noFill/>
+                </a:ln>
+                <a:solidFill>
+                  <a:schemeClr val="tx1"/>
+                </a:solidFill>
+                <a:effectLst/>
+                <a:latin typeface="Arial" panose="020B0604020202020204" pitchFamily="34" charset="0"/>
+              </a:rPr>
+              <a:t> </a:t>
+            </a:r>
+            <a:r>
+              <a:rPr kumimoji="0" lang="az-Latn-AZ" altLang="en-US" sz="1300" b="0" i="0" u="none" strike="noStrike" cap="none" normalizeH="0" baseline="0">
+                <a:ln>
+                  <a:noFill/>
+                </a:ln>
+                <a:solidFill>
+                  <a:schemeClr val="tx1"/>
+                </a:solidFill>
+                <a:effectLst/>
+                <a:latin typeface="Arial" panose="020B0604020202020204" pitchFamily="34" charset="0"/>
+              </a:rPr>
+              <a:t>mesajı görəcəyik. </a:t>
+            </a:r>
+            <a:endParaRPr kumimoji="0" lang="en-US" altLang="en-US" sz="1300" b="0" i="0" u="none" strike="noStrike" cap="none" normalizeH="0" baseline="0">
+              <a:ln>
+                <a:noFill/>
+              </a:ln>
+              <a:solidFill>
+                <a:schemeClr val="tx1"/>
+              </a:solidFill>
+              <a:effectLst/>
+              <a:latin typeface="Arial" panose="020B0604020202020204" pitchFamily="34" charset="0"/>
+            </a:endParaRPr>
+          </a:p>
+          <a:p>
+            <a:pPr>
+              <a:lnSpc>
+                <a:spcPct val="150000"/>
+              </a:lnSpc>
+              <a:buNone/>
+            </a:pPr>
+            <a:endParaRPr kumimoji="0" lang="en-US" altLang="en-US" sz="1300" b="0" i="0" u="none" strike="noStrike" cap="none" normalizeH="0" baseline="0">
+              <a:ln>
+                <a:noFill/>
+              </a:ln>
+              <a:solidFill>
+                <a:schemeClr val="tx1"/>
+              </a:solidFill>
+              <a:effectLst/>
+              <a:latin typeface="Arial" panose="020B0604020202020204" pitchFamily="34" charset="0"/>
+            </a:endParaRPr>
+          </a:p>
+        </p:txBody>
+      </p:sp>
+      <p:pic>
+        <p:nvPicPr>
+          <p:cNvPr id="4" name="Picture 3">
+            <a:extLst>
+              <a:ext uri="{FF2B5EF4-FFF2-40B4-BE49-F238E27FC236}">
+                <a16:creationId xmlns:a16="http://schemas.microsoft.com/office/drawing/2014/main" id="{3AEC3D48-355D-3471-7F36-3F9C19C5E186}"/>
+              </a:ext>
+            </a:extLst>
+          </p:cNvPr>
+          <p:cNvPicPr>
+            <a:picLocks noChangeAspect="1"/>
+          </p:cNvPicPr>
+          <p:nvPr/>
+        </p:nvPicPr>
+        <p:blipFill>
+          <a:blip r:embed="rId2"/>
+          <a:stretch>
+            <a:fillRect/>
+          </a:stretch>
+        </p:blipFill>
+        <p:spPr>
+          <a:xfrm>
+            <a:off x="0" y="1386226"/>
+            <a:ext cx="7830643" cy="2162477"/>
+          </a:xfrm>
+          <a:prstGeom prst="rect">
+            <a:avLst/>
+          </a:prstGeom>
+        </p:spPr>
+      </p:pic>
+      <p:pic>
+        <p:nvPicPr>
+          <p:cNvPr id="6" name="Picture 5">
+            <a:extLst>
+              <a:ext uri="{FF2B5EF4-FFF2-40B4-BE49-F238E27FC236}">
+                <a16:creationId xmlns:a16="http://schemas.microsoft.com/office/drawing/2014/main" id="{B00BC427-1E46-1D36-8F3A-E89DEDB1E8FB}"/>
+              </a:ext>
+            </a:extLst>
+          </p:cNvPr>
+          <p:cNvPicPr>
+            <a:picLocks noChangeAspect="1"/>
+          </p:cNvPicPr>
+          <p:nvPr/>
+        </p:nvPicPr>
+        <p:blipFill>
+          <a:blip r:embed="rId3"/>
+          <a:stretch>
+            <a:fillRect/>
+          </a:stretch>
+        </p:blipFill>
+        <p:spPr>
+          <a:xfrm>
+            <a:off x="7438362" y="4181101"/>
+            <a:ext cx="4753638" cy="2676899"/>
+          </a:xfrm>
+          <a:prstGeom prst="rect">
+            <a:avLst/>
+          </a:prstGeom>
+        </p:spPr>
+      </p:pic>
+    </p:spTree>
+    <p:extLst>
+      <p:ext uri="{BB962C8B-B14F-4D97-AF65-F5344CB8AC3E}">
+        <p14:creationId xmlns:p14="http://schemas.microsoft.com/office/powerpoint/2010/main" val="1647447912"/>
+      </p:ext>
+    </p:extLst>
+  </p:cSld>
+  <p:clrMapOvr>
+    <a:masterClrMapping/>
+  </p:clrMapOvr>
+</p:sld>
+</file>
+
+<file path=ppt/slides/slide7.xml><?xml version="1.0" encoding="utf-8"?>
+<p:sld xmlns:a="http://schemas.openxmlformats.org/drawingml/2006/main" xmlns:r="http://schemas.openxmlformats.org/officeDocument/2006/relationships" xmlns:p="http://schemas.openxmlformats.org/presentationml/2006/main">
+  <p:cSld>
+    <p:spTree>
+      <p:nvGrpSpPr>
+        <p:cNvPr id="1" name="">
+          <a:extLst>
+            <a:ext uri="{FF2B5EF4-FFF2-40B4-BE49-F238E27FC236}">
+              <a16:creationId xmlns:a16="http://schemas.microsoft.com/office/drawing/2014/main" id="{335D134B-02C6-4AE2-E9E5-F234E182D2F1}"/>
+            </a:ext>
+          </a:extLst>
+        </p:cNvPr>
+        <p:cNvGrpSpPr/>
+        <p:nvPr/>
+      </p:nvGrpSpPr>
+      <p:grpSpPr>
+        <a:xfrm>
+          <a:off x="0" y="0"/>
+          <a:ext cx="0" cy="0"/>
+          <a:chOff x="0" y="0"/>
+          <a:chExt cx="0" cy="0"/>
+        </a:xfrm>
+      </p:grpSpPr>
+      <p:sp>
+        <p:nvSpPr>
+          <p:cNvPr id="3" name="TextBox 2">
+            <a:extLst>
+              <a:ext uri="{FF2B5EF4-FFF2-40B4-BE49-F238E27FC236}">
+                <a16:creationId xmlns:a16="http://schemas.microsoft.com/office/drawing/2014/main" id="{007B66EC-A137-54B4-CD9E-FB69735C9BD1}"/>
+              </a:ext>
+            </a:extLst>
+          </p:cNvPr>
+          <p:cNvSpPr txBox="1"/>
+          <p:nvPr/>
+        </p:nvSpPr>
+        <p:spPr>
+          <a:xfrm>
+            <a:off x="217714" y="255046"/>
+            <a:ext cx="11756571" cy="355354"/>
+          </a:xfrm>
+          <a:prstGeom prst="rect">
+            <a:avLst/>
+          </a:prstGeom>
+          <a:noFill/>
+        </p:spPr>
+        <p:txBody>
+          <a:bodyPr wrap="square">
+            <a:spAutoFit/>
+          </a:bodyPr>
+          <a:lstStyle/>
+          <a:p>
+            <a:pPr>
+              <a:lnSpc>
+                <a:spcPct val="150000"/>
+              </a:lnSpc>
+              <a:buNone/>
+            </a:pPr>
+            <a:r>
+              <a:rPr kumimoji="0" lang="en-US" altLang="en-US" sz="1300" b="1" i="0" u="none" strike="noStrike" cap="none" normalizeH="0" baseline="0">
+                <a:ln>
+                  <a:noFill/>
+                </a:ln>
+                <a:solidFill>
+                  <a:srgbClr val="FF0000"/>
+                </a:solidFill>
+                <a:effectLst/>
+                <a:latin typeface="Arial" panose="020B0604020202020204" pitchFamily="34" charset="0"/>
+              </a:rPr>
+              <a:t>onlyTrashed() </a:t>
+            </a:r>
+            <a:r>
+              <a:rPr kumimoji="0" lang="en-US" altLang="en-US" sz="1300" b="0" i="0" u="none" strike="noStrike" cap="none" normalizeH="0" baseline="0">
+                <a:ln>
+                  <a:noFill/>
+                </a:ln>
+                <a:solidFill>
+                  <a:schemeClr val="tx1"/>
+                </a:solidFill>
+                <a:effectLst/>
+                <a:latin typeface="Arial" panose="020B0604020202020204" pitchFamily="34" charset="0"/>
+              </a:rPr>
+              <a:t>funksiyası Laravel-in </a:t>
+            </a:r>
+            <a:r>
+              <a:rPr kumimoji="0" lang="en-US" altLang="en-US" sz="1300" b="1" i="0" u="none" strike="noStrike" cap="none" normalizeH="0" baseline="0">
+                <a:ln>
+                  <a:noFill/>
+                </a:ln>
+                <a:solidFill>
+                  <a:schemeClr val="tx1"/>
+                </a:solidFill>
+                <a:effectLst/>
+                <a:latin typeface="Arial" panose="020B0604020202020204" pitchFamily="34" charset="0"/>
+              </a:rPr>
+              <a:t>Soft Delete </a:t>
+            </a:r>
+            <a:r>
+              <a:rPr kumimoji="0" lang="en-US" altLang="en-US" sz="1300" b="0" i="0" u="none" strike="noStrike" cap="none" normalizeH="0" baseline="0">
+                <a:ln>
+                  <a:noFill/>
+                </a:ln>
+                <a:solidFill>
+                  <a:schemeClr val="tx1"/>
+                </a:solidFill>
+                <a:effectLst/>
+                <a:latin typeface="Arial" panose="020B0604020202020204" pitchFamily="34" charset="0"/>
+              </a:rPr>
+              <a:t>(yumşaq silmə) xüsusiyyətindən gələn bir </a:t>
+            </a:r>
+            <a:r>
+              <a:rPr kumimoji="0" lang="en-US" altLang="en-US" sz="1300" b="1" i="0" u="none" strike="noStrike" cap="none" normalizeH="0" baseline="0">
+                <a:ln>
+                  <a:noFill/>
+                </a:ln>
+                <a:solidFill>
+                  <a:schemeClr val="tx1"/>
+                </a:solidFill>
+                <a:effectLst/>
+                <a:latin typeface="Arial" panose="020B0604020202020204" pitchFamily="34" charset="0"/>
+              </a:rPr>
+              <a:t>Eloquent query builder </a:t>
+            </a:r>
+            <a:r>
+              <a:rPr kumimoji="0" lang="en-US" altLang="en-US" sz="1300" b="0" i="0" u="none" strike="noStrike" cap="none" normalizeH="0" baseline="0">
+                <a:ln>
+                  <a:noFill/>
+                </a:ln>
+                <a:solidFill>
+                  <a:schemeClr val="tx1"/>
+                </a:solidFill>
+                <a:effectLst/>
+                <a:latin typeface="Arial" panose="020B0604020202020204" pitchFamily="34" charset="0"/>
+              </a:rPr>
+              <a:t>metodudur.</a:t>
+            </a:r>
+          </a:p>
+        </p:txBody>
+      </p:sp>
+      <p:pic>
+        <p:nvPicPr>
+          <p:cNvPr id="4" name="Picture 3">
+            <a:extLst>
+              <a:ext uri="{FF2B5EF4-FFF2-40B4-BE49-F238E27FC236}">
+                <a16:creationId xmlns:a16="http://schemas.microsoft.com/office/drawing/2014/main" id="{814402CF-F950-5421-EB31-2679679190C4}"/>
+              </a:ext>
+            </a:extLst>
+          </p:cNvPr>
+          <p:cNvPicPr>
+            <a:picLocks noChangeAspect="1"/>
+          </p:cNvPicPr>
+          <p:nvPr/>
+        </p:nvPicPr>
+        <p:blipFill>
+          <a:blip r:embed="rId2"/>
+          <a:stretch>
+            <a:fillRect/>
+          </a:stretch>
+        </p:blipFill>
+        <p:spPr>
+          <a:xfrm>
+            <a:off x="0" y="788035"/>
+            <a:ext cx="12192000" cy="6069965"/>
+          </a:xfrm>
+          <a:prstGeom prst="rect">
+            <a:avLst/>
+          </a:prstGeom>
+        </p:spPr>
+      </p:pic>
+    </p:spTree>
+    <p:extLst>
+      <p:ext uri="{BB962C8B-B14F-4D97-AF65-F5344CB8AC3E}">
+        <p14:creationId xmlns:p14="http://schemas.microsoft.com/office/powerpoint/2010/main" val="768063576"/>
+      </p:ext>
+    </p:extLst>
+  </p:cSld>
+  <p:clrMapOvr>
+    <a:masterClrMapping/>
+  </p:clrMapOvr>
+</p:sld>
+</file>
+
+<file path=ppt/slides/slide8.xml><?xml version="1.0" encoding="utf-8"?>
 <p:sld xmlns:a="http://schemas.openxmlformats.org/drawingml/2006/main" xmlns:r="http://schemas.openxmlformats.org/officeDocument/2006/relationships" xmlns:p="http://schemas.openxmlformats.org/presentationml/2006/main">
   <p:cSld>
     <p:spTree>
@@ -3608,6 +5429,957 @@
         <p:spPr>
           <a:xfrm>
             <a:off x="217714" y="255046"/>
+            <a:ext cx="11756571" cy="2155847"/>
+          </a:xfrm>
+          <a:prstGeom prst="rect">
+            <a:avLst/>
+          </a:prstGeom>
+          <a:noFill/>
+        </p:spPr>
+        <p:txBody>
+          <a:bodyPr wrap="square">
+            <a:spAutoFit/>
+          </a:bodyPr>
+          <a:lstStyle/>
+          <a:p>
+            <a:pPr>
+              <a:lnSpc>
+                <a:spcPct val="150000"/>
+              </a:lnSpc>
+              <a:buNone/>
+            </a:pPr>
+            <a:r>
+              <a:rPr kumimoji="0" lang="en-US" altLang="en-US" sz="1300" b="1" i="0" u="none" strike="noStrike" cap="none" normalizeH="0" baseline="0">
+                <a:ln>
+                  <a:noFill/>
+                </a:ln>
+                <a:solidFill>
+                  <a:srgbClr val="FF0000"/>
+                </a:solidFill>
+                <a:effectLst/>
+                <a:latin typeface="Arial" panose="020B0604020202020204" pitchFamily="34" charset="0"/>
+              </a:rPr>
+              <a:t>onlyTrashed() nə edir</a:t>
+            </a:r>
+            <a:r>
+              <a:rPr kumimoji="0" lang="en-US" altLang="en-US" sz="1300" b="0" i="0" u="none" strike="noStrike" cap="none" normalizeH="0" baseline="0">
+                <a:ln>
+                  <a:noFill/>
+                </a:ln>
+                <a:solidFill>
+                  <a:schemeClr val="tx1"/>
+                </a:solidFill>
+                <a:effectLst/>
+                <a:latin typeface="Arial" panose="020B0604020202020204" pitchFamily="34" charset="0"/>
+              </a:rPr>
+              <a:t>? </a:t>
+            </a:r>
+            <a:br>
+              <a:rPr kumimoji="0" lang="az-Latn-AZ" altLang="en-US" sz="1300" b="0" i="0" u="none" strike="noStrike" cap="none" normalizeH="0" baseline="0">
+                <a:ln>
+                  <a:noFill/>
+                </a:ln>
+                <a:solidFill>
+                  <a:schemeClr val="tx1"/>
+                </a:solidFill>
+                <a:effectLst/>
+                <a:latin typeface="Arial" panose="020B0604020202020204" pitchFamily="34" charset="0"/>
+              </a:rPr>
+            </a:br>
+            <a:br>
+              <a:rPr kumimoji="0" lang="az-Latn-AZ" altLang="en-US" sz="1300" b="0" i="0" u="none" strike="noStrike" cap="none" normalizeH="0" baseline="0">
+                <a:ln>
+                  <a:noFill/>
+                </a:ln>
+                <a:solidFill>
+                  <a:schemeClr val="tx1"/>
+                </a:solidFill>
+                <a:effectLst/>
+                <a:latin typeface="Arial" panose="020B0604020202020204" pitchFamily="34" charset="0"/>
+              </a:rPr>
+            </a:br>
+            <a:r>
+              <a:rPr kumimoji="0" lang="en-US" altLang="en-US" sz="1300" b="1" i="0" u="none" strike="noStrike" cap="none" normalizeH="0" baseline="0">
+                <a:ln>
+                  <a:noFill/>
+                </a:ln>
+                <a:solidFill>
+                  <a:schemeClr val="tx1"/>
+                </a:solidFill>
+                <a:effectLst/>
+                <a:latin typeface="Arial" panose="020B0604020202020204" pitchFamily="34" charset="0"/>
+              </a:rPr>
+              <a:t>onlyTrashed() </a:t>
+            </a:r>
+            <a:r>
+              <a:rPr kumimoji="0" lang="en-US" altLang="en-US" sz="1300" b="0" i="0" u="none" strike="noStrike" cap="none" normalizeH="0" baseline="0">
+                <a:ln>
+                  <a:noFill/>
+                </a:ln>
+                <a:solidFill>
+                  <a:schemeClr val="tx1"/>
+                </a:solidFill>
+                <a:effectLst/>
+                <a:latin typeface="Arial" panose="020B0604020202020204" pitchFamily="34" charset="0"/>
+              </a:rPr>
+              <a:t>yalnız silinmiş (</a:t>
+            </a:r>
+            <a:r>
+              <a:rPr kumimoji="0" lang="en-US" altLang="en-US" sz="1300" b="1" i="0" u="none" strike="noStrike" cap="none" normalizeH="0" baseline="0">
+                <a:ln>
+                  <a:noFill/>
+                </a:ln>
+                <a:solidFill>
+                  <a:schemeClr val="tx1"/>
+                </a:solidFill>
+                <a:effectLst/>
+                <a:latin typeface="Arial" panose="020B0604020202020204" pitchFamily="34" charset="0"/>
+              </a:rPr>
+              <a:t>soft deleted</a:t>
+            </a:r>
+            <a:r>
+              <a:rPr kumimoji="0" lang="en-US" altLang="en-US" sz="1300" b="0" i="0" u="none" strike="noStrike" cap="none" normalizeH="0" baseline="0">
+                <a:ln>
+                  <a:noFill/>
+                </a:ln>
+                <a:solidFill>
+                  <a:schemeClr val="tx1"/>
+                </a:solidFill>
+                <a:effectLst/>
+                <a:latin typeface="Arial" panose="020B0604020202020204" pitchFamily="34" charset="0"/>
+              </a:rPr>
+              <a:t>) qeyd(lər)i gətirir. Laravel-də bir model SoftDeletes trait-i istifadə edirsə, o model silindiyində verilənlər bazasından tam silinmir, sadəcə </a:t>
+            </a:r>
+            <a:r>
+              <a:rPr kumimoji="0" lang="en-US" altLang="en-US" sz="1300" b="1" i="0" u="none" strike="noStrike" cap="none" normalizeH="0" baseline="0">
+                <a:ln>
+                  <a:noFill/>
+                </a:ln>
+                <a:solidFill>
+                  <a:schemeClr val="tx1"/>
+                </a:solidFill>
+                <a:effectLst/>
+                <a:latin typeface="Arial" panose="020B0604020202020204" pitchFamily="34" charset="0"/>
+              </a:rPr>
+              <a:t>deleted_at</a:t>
+            </a:r>
+            <a:r>
+              <a:rPr kumimoji="0" lang="en-US" altLang="en-US" sz="1300" b="0" i="0" u="none" strike="noStrike" cap="none" normalizeH="0" baseline="0">
+                <a:ln>
+                  <a:noFill/>
+                </a:ln>
+                <a:solidFill>
+                  <a:schemeClr val="tx1"/>
+                </a:solidFill>
+                <a:effectLst/>
+                <a:latin typeface="Arial" panose="020B0604020202020204" pitchFamily="34" charset="0"/>
+              </a:rPr>
+              <a:t> sütununa tarix yazılır. Bu zaman həmin model "silinmiş kimi görünür", amma hələ də bazadadır.</a:t>
+            </a:r>
+            <a:endParaRPr kumimoji="0" lang="az-Latn-AZ" altLang="en-US" sz="1300" b="0" i="0" u="none" strike="noStrike" cap="none" normalizeH="0" baseline="0">
+              <a:ln>
+                <a:noFill/>
+              </a:ln>
+              <a:solidFill>
+                <a:schemeClr val="tx1"/>
+              </a:solidFill>
+              <a:effectLst/>
+              <a:latin typeface="Arial" panose="020B0604020202020204" pitchFamily="34" charset="0"/>
+            </a:endParaRPr>
+          </a:p>
+          <a:p>
+            <a:pPr>
+              <a:lnSpc>
+                <a:spcPct val="150000"/>
+              </a:lnSpc>
+              <a:buNone/>
+            </a:pPr>
+            <a:endParaRPr lang="az-Latn-AZ" altLang="en-US" sz="1300">
+              <a:latin typeface="Arial" panose="020B0604020202020204" pitchFamily="34" charset="0"/>
+            </a:endParaRPr>
+          </a:p>
+          <a:p>
+            <a:pPr>
+              <a:lnSpc>
+                <a:spcPct val="150000"/>
+              </a:lnSpc>
+              <a:buNone/>
+            </a:pPr>
+            <a:endParaRPr lang="az-Latn-AZ" altLang="en-US" sz="1300">
+              <a:latin typeface="Arial" panose="020B0604020202020204" pitchFamily="34" charset="0"/>
+            </a:endParaRPr>
+          </a:p>
+          <a:p>
+            <a:pPr>
+              <a:lnSpc>
+                <a:spcPct val="150000"/>
+              </a:lnSpc>
+              <a:buNone/>
+            </a:pPr>
+            <a:r>
+              <a:rPr lang="az-Latn-AZ" altLang="en-US" sz="1300" b="1">
+                <a:latin typeface="Arial" panose="020B0604020202020204" pitchFamily="34" charset="0"/>
+              </a:rPr>
+              <a:t>onlyTrashed() </a:t>
+            </a:r>
+            <a:r>
+              <a:rPr lang="az-Latn-AZ" altLang="en-US" sz="1300">
+                <a:latin typeface="Arial" panose="020B0604020202020204" pitchFamily="34" charset="0"/>
+              </a:rPr>
+              <a:t>ilə birlikdə istifadə edilən digər funksiyalar:</a:t>
+            </a:r>
+          </a:p>
+        </p:txBody>
+      </p:sp>
+      <p:graphicFrame>
+        <p:nvGraphicFramePr>
+          <p:cNvPr id="5" name="Table 4">
+            <a:extLst>
+              <a:ext uri="{FF2B5EF4-FFF2-40B4-BE49-F238E27FC236}">
+                <a16:creationId xmlns:a16="http://schemas.microsoft.com/office/drawing/2014/main" id="{34CA8956-05AF-6ECF-50B8-4B0080087339}"/>
+              </a:ext>
+            </a:extLst>
+          </p:cNvPr>
+          <p:cNvGraphicFramePr>
+            <a:graphicFrameLocks noGrp="1"/>
+          </p:cNvGraphicFramePr>
+          <p:nvPr>
+            <p:extLst>
+              <p:ext uri="{D42A27DB-BD31-4B8C-83A1-F6EECF244321}">
+                <p14:modId xmlns:p14="http://schemas.microsoft.com/office/powerpoint/2010/main" val="2760841012"/>
+              </p:ext>
+            </p:extLst>
+          </p:nvPr>
+        </p:nvGraphicFramePr>
+        <p:xfrm>
+          <a:off x="217714" y="2638649"/>
+          <a:ext cx="11001866" cy="3045715"/>
+        </p:xfrm>
+        <a:graphic>
+          <a:graphicData uri="http://schemas.openxmlformats.org/drawingml/2006/table">
+            <a:tbl>
+              <a:tblPr/>
+              <a:tblGrid>
+                <a:gridCol w="2458972">
+                  <a:extLst>
+                    <a:ext uri="{9D8B030D-6E8A-4147-A177-3AD203B41FA5}">
+                      <a16:colId xmlns:a16="http://schemas.microsoft.com/office/drawing/2014/main" val="3275328491"/>
+                    </a:ext>
+                  </a:extLst>
+                </a:gridCol>
+                <a:gridCol w="8542894">
+                  <a:extLst>
+                    <a:ext uri="{9D8B030D-6E8A-4147-A177-3AD203B41FA5}">
+                      <a16:colId xmlns:a16="http://schemas.microsoft.com/office/drawing/2014/main" val="2395981640"/>
+                    </a:ext>
+                  </a:extLst>
+                </a:gridCol>
+              </a:tblGrid>
+              <a:tr h="609143">
+                <a:tc>
+                  <a:txBody>
+                    <a:bodyPr/>
+                    <a:lstStyle/>
+                    <a:p>
+                      <a:r>
+                        <a:rPr lang="en-US" b="1"/>
+                        <a:t>Funksiya</a:t>
+                      </a:r>
+                    </a:p>
+                  </a:txBody>
+                  <a:tcPr anchor="ctr">
+                    <a:lnL w="12700" cap="flat" cmpd="sng" algn="ctr">
+                      <a:solidFill>
+                        <a:schemeClr val="tx1"/>
+                      </a:solidFill>
+                      <a:prstDash val="solid"/>
+                      <a:round/>
+                      <a:headEnd type="none" w="med" len="med"/>
+                      <a:tailEnd type="none" w="med" len="med"/>
+                    </a:lnL>
+                    <a:lnR w="12700" cap="flat" cmpd="sng" algn="ctr">
+                      <a:solidFill>
+                        <a:schemeClr val="tx1"/>
+                      </a:solidFill>
+                      <a:prstDash val="solid"/>
+                      <a:round/>
+                      <a:headEnd type="none" w="med" len="med"/>
+                      <a:tailEnd type="none" w="med" len="med"/>
+                    </a:lnR>
+                    <a:lnT w="12700" cap="flat" cmpd="sng" algn="ctr">
+                      <a:solidFill>
+                        <a:schemeClr val="tx1"/>
+                      </a:solidFill>
+                      <a:prstDash val="solid"/>
+                      <a:round/>
+                      <a:headEnd type="none" w="med" len="med"/>
+                      <a:tailEnd type="none" w="med" len="med"/>
+                    </a:lnT>
+                    <a:lnB w="12700" cap="flat" cmpd="sng" algn="ctr">
+                      <a:solidFill>
+                        <a:schemeClr val="tx1"/>
+                      </a:solidFill>
+                      <a:prstDash val="solid"/>
+                      <a:round/>
+                      <a:headEnd type="none" w="med" len="med"/>
+                      <a:tailEnd type="none" w="med" len="med"/>
+                    </a:lnB>
+                    <a:lnTlToBr w="12700" cmpd="sng">
+                      <a:noFill/>
+                      <a:prstDash val="solid"/>
+                    </a:lnTlToBr>
+                    <a:lnBlToTr w="12700" cmpd="sng">
+                      <a:noFill/>
+                      <a:prstDash val="solid"/>
+                    </a:lnBlToTr>
+                    <a:solidFill>
+                      <a:schemeClr val="accent2"/>
+                    </a:solidFill>
+                  </a:tcPr>
+                </a:tc>
+                <a:tc>
+                  <a:txBody>
+                    <a:bodyPr/>
+                    <a:lstStyle/>
+                    <a:p>
+                      <a:r>
+                        <a:rPr lang="en-US" b="1"/>
+                        <a:t>Açıqlama</a:t>
+                      </a:r>
+                    </a:p>
+                  </a:txBody>
+                  <a:tcPr anchor="ctr">
+                    <a:lnL w="12700" cap="flat" cmpd="sng" algn="ctr">
+                      <a:solidFill>
+                        <a:schemeClr val="tx1"/>
+                      </a:solidFill>
+                      <a:prstDash val="solid"/>
+                      <a:round/>
+                      <a:headEnd type="none" w="med" len="med"/>
+                      <a:tailEnd type="none" w="med" len="med"/>
+                    </a:lnL>
+                    <a:lnR w="12700" cap="flat" cmpd="sng" algn="ctr">
+                      <a:solidFill>
+                        <a:schemeClr val="tx1"/>
+                      </a:solidFill>
+                      <a:prstDash val="solid"/>
+                      <a:round/>
+                      <a:headEnd type="none" w="med" len="med"/>
+                      <a:tailEnd type="none" w="med" len="med"/>
+                    </a:lnR>
+                    <a:lnT w="12700" cap="flat" cmpd="sng" algn="ctr">
+                      <a:solidFill>
+                        <a:schemeClr val="tx1"/>
+                      </a:solidFill>
+                      <a:prstDash val="solid"/>
+                      <a:round/>
+                      <a:headEnd type="none" w="med" len="med"/>
+                      <a:tailEnd type="none" w="med" len="med"/>
+                    </a:lnT>
+                    <a:lnB w="12700" cap="flat" cmpd="sng" algn="ctr">
+                      <a:solidFill>
+                        <a:schemeClr val="tx1"/>
+                      </a:solidFill>
+                      <a:prstDash val="solid"/>
+                      <a:round/>
+                      <a:headEnd type="none" w="med" len="med"/>
+                      <a:tailEnd type="none" w="med" len="med"/>
+                    </a:lnB>
+                    <a:lnTlToBr w="12700" cmpd="sng">
+                      <a:noFill/>
+                      <a:prstDash val="solid"/>
+                    </a:lnTlToBr>
+                    <a:lnBlToTr w="12700" cmpd="sng">
+                      <a:noFill/>
+                      <a:prstDash val="solid"/>
+                    </a:lnBlToTr>
+                    <a:solidFill>
+                      <a:schemeClr val="accent2"/>
+                    </a:solidFill>
+                  </a:tcPr>
+                </a:tc>
+                <a:extLst>
+                  <a:ext uri="{0D108BD9-81ED-4DB2-BD59-A6C34878D82A}">
+                    <a16:rowId xmlns:a16="http://schemas.microsoft.com/office/drawing/2014/main" val="2001484914"/>
+                  </a:ext>
+                </a:extLst>
+              </a:tr>
+              <a:tr h="609143">
+                <a:tc>
+                  <a:txBody>
+                    <a:bodyPr/>
+                    <a:lstStyle/>
+                    <a:p>
+                      <a:r>
+                        <a:rPr lang="en-US"/>
+                        <a:t>withTrashed()</a:t>
+                      </a:r>
+                    </a:p>
+                  </a:txBody>
+                  <a:tcPr anchor="ctr">
+                    <a:lnL w="12700" cap="flat" cmpd="sng" algn="ctr">
+                      <a:solidFill>
+                        <a:schemeClr val="tx1"/>
+                      </a:solidFill>
+                      <a:prstDash val="solid"/>
+                      <a:round/>
+                      <a:headEnd type="none" w="med" len="med"/>
+                      <a:tailEnd type="none" w="med" len="med"/>
+                    </a:lnL>
+                    <a:lnR w="12700" cap="flat" cmpd="sng" algn="ctr">
+                      <a:solidFill>
+                        <a:schemeClr val="tx1"/>
+                      </a:solidFill>
+                      <a:prstDash val="solid"/>
+                      <a:round/>
+                      <a:headEnd type="none" w="med" len="med"/>
+                      <a:tailEnd type="none" w="med" len="med"/>
+                    </a:lnR>
+                    <a:lnT w="12700" cap="flat" cmpd="sng" algn="ctr">
+                      <a:solidFill>
+                        <a:schemeClr val="tx1"/>
+                      </a:solidFill>
+                      <a:prstDash val="solid"/>
+                      <a:round/>
+                      <a:headEnd type="none" w="med" len="med"/>
+                      <a:tailEnd type="none" w="med" len="med"/>
+                    </a:lnT>
+                    <a:lnB w="12700" cap="flat" cmpd="sng" algn="ctr">
+                      <a:solidFill>
+                        <a:schemeClr val="tx1"/>
+                      </a:solidFill>
+                      <a:prstDash val="solid"/>
+                      <a:round/>
+                      <a:headEnd type="none" w="med" len="med"/>
+                      <a:tailEnd type="none" w="med" len="med"/>
+                    </a:lnB>
+                    <a:lnTlToBr w="12700" cmpd="sng">
+                      <a:noFill/>
+                      <a:prstDash val="solid"/>
+                    </a:lnTlToBr>
+                    <a:lnBlToTr w="12700" cmpd="sng">
+                      <a:noFill/>
+                      <a:prstDash val="solid"/>
+                    </a:lnBlToTr>
+                    <a:noFill/>
+                  </a:tcPr>
+                </a:tc>
+                <a:tc>
+                  <a:txBody>
+                    <a:bodyPr/>
+                    <a:lstStyle/>
+                    <a:p>
+                      <a:r>
+                        <a:rPr lang="en-US"/>
+                        <a:t>Həm silinmiş, həm də aktiv (silinməmiş) qeydləri gətirir</a:t>
+                      </a:r>
+                    </a:p>
+                  </a:txBody>
+                  <a:tcPr anchor="ctr">
+                    <a:lnL w="12700" cap="flat" cmpd="sng" algn="ctr">
+                      <a:solidFill>
+                        <a:schemeClr val="tx1"/>
+                      </a:solidFill>
+                      <a:prstDash val="solid"/>
+                      <a:round/>
+                      <a:headEnd type="none" w="med" len="med"/>
+                      <a:tailEnd type="none" w="med" len="med"/>
+                    </a:lnL>
+                    <a:lnR w="12700" cap="flat" cmpd="sng" algn="ctr">
+                      <a:solidFill>
+                        <a:schemeClr val="tx1"/>
+                      </a:solidFill>
+                      <a:prstDash val="solid"/>
+                      <a:round/>
+                      <a:headEnd type="none" w="med" len="med"/>
+                      <a:tailEnd type="none" w="med" len="med"/>
+                    </a:lnR>
+                    <a:lnT w="12700" cap="flat" cmpd="sng" algn="ctr">
+                      <a:solidFill>
+                        <a:schemeClr val="tx1"/>
+                      </a:solidFill>
+                      <a:prstDash val="solid"/>
+                      <a:round/>
+                      <a:headEnd type="none" w="med" len="med"/>
+                      <a:tailEnd type="none" w="med" len="med"/>
+                    </a:lnT>
+                    <a:lnB w="12700" cap="flat" cmpd="sng" algn="ctr">
+                      <a:solidFill>
+                        <a:schemeClr val="tx1"/>
+                      </a:solidFill>
+                      <a:prstDash val="solid"/>
+                      <a:round/>
+                      <a:headEnd type="none" w="med" len="med"/>
+                      <a:tailEnd type="none" w="med" len="med"/>
+                    </a:lnB>
+                    <a:lnTlToBr w="12700" cmpd="sng">
+                      <a:noFill/>
+                      <a:prstDash val="solid"/>
+                    </a:lnTlToBr>
+                    <a:lnBlToTr w="12700" cmpd="sng">
+                      <a:noFill/>
+                      <a:prstDash val="solid"/>
+                    </a:lnBlToTr>
+                    <a:noFill/>
+                  </a:tcPr>
+                </a:tc>
+                <a:extLst>
+                  <a:ext uri="{0D108BD9-81ED-4DB2-BD59-A6C34878D82A}">
+                    <a16:rowId xmlns:a16="http://schemas.microsoft.com/office/drawing/2014/main" val="2345535884"/>
+                  </a:ext>
+                </a:extLst>
+              </a:tr>
+              <a:tr h="609143">
+                <a:tc>
+                  <a:txBody>
+                    <a:bodyPr/>
+                    <a:lstStyle/>
+                    <a:p>
+                      <a:r>
+                        <a:rPr lang="en-US"/>
+                        <a:t>onlyTrashed()</a:t>
+                      </a:r>
+                    </a:p>
+                  </a:txBody>
+                  <a:tcPr anchor="ctr">
+                    <a:lnL w="12700" cap="flat" cmpd="sng" algn="ctr">
+                      <a:solidFill>
+                        <a:schemeClr val="tx1"/>
+                      </a:solidFill>
+                      <a:prstDash val="solid"/>
+                      <a:round/>
+                      <a:headEnd type="none" w="med" len="med"/>
+                      <a:tailEnd type="none" w="med" len="med"/>
+                    </a:lnL>
+                    <a:lnR w="12700" cap="flat" cmpd="sng" algn="ctr">
+                      <a:solidFill>
+                        <a:schemeClr val="tx1"/>
+                      </a:solidFill>
+                      <a:prstDash val="solid"/>
+                      <a:round/>
+                      <a:headEnd type="none" w="med" len="med"/>
+                      <a:tailEnd type="none" w="med" len="med"/>
+                    </a:lnR>
+                    <a:lnT w="12700" cap="flat" cmpd="sng" algn="ctr">
+                      <a:solidFill>
+                        <a:schemeClr val="tx1"/>
+                      </a:solidFill>
+                      <a:prstDash val="solid"/>
+                      <a:round/>
+                      <a:headEnd type="none" w="med" len="med"/>
+                      <a:tailEnd type="none" w="med" len="med"/>
+                    </a:lnT>
+                    <a:lnB w="12700" cap="flat" cmpd="sng" algn="ctr">
+                      <a:solidFill>
+                        <a:schemeClr val="tx1"/>
+                      </a:solidFill>
+                      <a:prstDash val="solid"/>
+                      <a:round/>
+                      <a:headEnd type="none" w="med" len="med"/>
+                      <a:tailEnd type="none" w="med" len="med"/>
+                    </a:lnB>
+                    <a:lnTlToBr w="12700" cmpd="sng">
+                      <a:noFill/>
+                      <a:prstDash val="solid"/>
+                    </a:lnTlToBr>
+                    <a:lnBlToTr w="12700" cmpd="sng">
+                      <a:noFill/>
+                      <a:prstDash val="solid"/>
+                    </a:lnBlToTr>
+                    <a:noFill/>
+                  </a:tcPr>
+                </a:tc>
+                <a:tc>
+                  <a:txBody>
+                    <a:bodyPr/>
+                    <a:lstStyle/>
+                    <a:p>
+                      <a:r>
+                        <a:rPr lang="en-US"/>
+                        <a:t>Yalnız </a:t>
+                      </a:r>
+                      <a:r>
+                        <a:rPr lang="en-US" b="1"/>
+                        <a:t>soft-deleted</a:t>
+                      </a:r>
+                      <a:r>
+                        <a:rPr lang="en-US"/>
+                        <a:t> (silinmiş) qeydləri gətirir</a:t>
+                      </a:r>
+                    </a:p>
+                  </a:txBody>
+                  <a:tcPr anchor="ctr">
+                    <a:lnL w="12700" cap="flat" cmpd="sng" algn="ctr">
+                      <a:solidFill>
+                        <a:schemeClr val="tx1"/>
+                      </a:solidFill>
+                      <a:prstDash val="solid"/>
+                      <a:round/>
+                      <a:headEnd type="none" w="med" len="med"/>
+                      <a:tailEnd type="none" w="med" len="med"/>
+                    </a:lnL>
+                    <a:lnR w="12700" cap="flat" cmpd="sng" algn="ctr">
+                      <a:solidFill>
+                        <a:schemeClr val="tx1"/>
+                      </a:solidFill>
+                      <a:prstDash val="solid"/>
+                      <a:round/>
+                      <a:headEnd type="none" w="med" len="med"/>
+                      <a:tailEnd type="none" w="med" len="med"/>
+                    </a:lnR>
+                    <a:lnT w="12700" cap="flat" cmpd="sng" algn="ctr">
+                      <a:solidFill>
+                        <a:schemeClr val="tx1"/>
+                      </a:solidFill>
+                      <a:prstDash val="solid"/>
+                      <a:round/>
+                      <a:headEnd type="none" w="med" len="med"/>
+                      <a:tailEnd type="none" w="med" len="med"/>
+                    </a:lnT>
+                    <a:lnB w="12700" cap="flat" cmpd="sng" algn="ctr">
+                      <a:solidFill>
+                        <a:schemeClr val="tx1"/>
+                      </a:solidFill>
+                      <a:prstDash val="solid"/>
+                      <a:round/>
+                      <a:headEnd type="none" w="med" len="med"/>
+                      <a:tailEnd type="none" w="med" len="med"/>
+                    </a:lnB>
+                    <a:lnTlToBr w="12700" cmpd="sng">
+                      <a:noFill/>
+                      <a:prstDash val="solid"/>
+                    </a:lnTlToBr>
+                    <a:lnBlToTr w="12700" cmpd="sng">
+                      <a:noFill/>
+                      <a:prstDash val="solid"/>
+                    </a:lnBlToTr>
+                    <a:noFill/>
+                  </a:tcPr>
+                </a:tc>
+                <a:extLst>
+                  <a:ext uri="{0D108BD9-81ED-4DB2-BD59-A6C34878D82A}">
+                    <a16:rowId xmlns:a16="http://schemas.microsoft.com/office/drawing/2014/main" val="661519067"/>
+                  </a:ext>
+                </a:extLst>
+              </a:tr>
+              <a:tr h="609143">
+                <a:tc>
+                  <a:txBody>
+                    <a:bodyPr/>
+                    <a:lstStyle/>
+                    <a:p>
+                      <a:r>
+                        <a:rPr lang="en-US"/>
+                        <a:t>restore()</a:t>
+                      </a:r>
+                    </a:p>
+                  </a:txBody>
+                  <a:tcPr anchor="ctr">
+                    <a:lnL w="12700" cap="flat" cmpd="sng" algn="ctr">
+                      <a:solidFill>
+                        <a:schemeClr val="tx1"/>
+                      </a:solidFill>
+                      <a:prstDash val="solid"/>
+                      <a:round/>
+                      <a:headEnd type="none" w="med" len="med"/>
+                      <a:tailEnd type="none" w="med" len="med"/>
+                    </a:lnL>
+                    <a:lnR w="12700" cap="flat" cmpd="sng" algn="ctr">
+                      <a:solidFill>
+                        <a:schemeClr val="tx1"/>
+                      </a:solidFill>
+                      <a:prstDash val="solid"/>
+                      <a:round/>
+                      <a:headEnd type="none" w="med" len="med"/>
+                      <a:tailEnd type="none" w="med" len="med"/>
+                    </a:lnR>
+                    <a:lnT w="12700" cap="flat" cmpd="sng" algn="ctr">
+                      <a:solidFill>
+                        <a:schemeClr val="tx1"/>
+                      </a:solidFill>
+                      <a:prstDash val="solid"/>
+                      <a:round/>
+                      <a:headEnd type="none" w="med" len="med"/>
+                      <a:tailEnd type="none" w="med" len="med"/>
+                    </a:lnT>
+                    <a:lnB w="12700" cap="flat" cmpd="sng" algn="ctr">
+                      <a:solidFill>
+                        <a:schemeClr val="tx1"/>
+                      </a:solidFill>
+                      <a:prstDash val="solid"/>
+                      <a:round/>
+                      <a:headEnd type="none" w="med" len="med"/>
+                      <a:tailEnd type="none" w="med" len="med"/>
+                    </a:lnB>
+                    <a:lnTlToBr w="12700" cmpd="sng">
+                      <a:noFill/>
+                      <a:prstDash val="solid"/>
+                    </a:lnTlToBr>
+                    <a:lnBlToTr w="12700" cmpd="sng">
+                      <a:noFill/>
+                      <a:prstDash val="solid"/>
+                    </a:lnBlToTr>
+                    <a:noFill/>
+                  </a:tcPr>
+                </a:tc>
+                <a:tc>
+                  <a:txBody>
+                    <a:bodyPr/>
+                    <a:lstStyle/>
+                    <a:p>
+                      <a:r>
+                        <a:rPr lang="en-US"/>
+                        <a:t>Soft-deleted qeydi </a:t>
+                      </a:r>
+                      <a:r>
+                        <a:rPr lang="en-US" b="1"/>
+                        <a:t>bərpa edir</a:t>
+                      </a:r>
+                      <a:endParaRPr lang="en-US"/>
+                    </a:p>
+                  </a:txBody>
+                  <a:tcPr anchor="ctr">
+                    <a:lnL w="12700" cap="flat" cmpd="sng" algn="ctr">
+                      <a:solidFill>
+                        <a:schemeClr val="tx1"/>
+                      </a:solidFill>
+                      <a:prstDash val="solid"/>
+                      <a:round/>
+                      <a:headEnd type="none" w="med" len="med"/>
+                      <a:tailEnd type="none" w="med" len="med"/>
+                    </a:lnL>
+                    <a:lnR w="12700" cap="flat" cmpd="sng" algn="ctr">
+                      <a:solidFill>
+                        <a:schemeClr val="tx1"/>
+                      </a:solidFill>
+                      <a:prstDash val="solid"/>
+                      <a:round/>
+                      <a:headEnd type="none" w="med" len="med"/>
+                      <a:tailEnd type="none" w="med" len="med"/>
+                    </a:lnR>
+                    <a:lnT w="12700" cap="flat" cmpd="sng" algn="ctr">
+                      <a:solidFill>
+                        <a:schemeClr val="tx1"/>
+                      </a:solidFill>
+                      <a:prstDash val="solid"/>
+                      <a:round/>
+                      <a:headEnd type="none" w="med" len="med"/>
+                      <a:tailEnd type="none" w="med" len="med"/>
+                    </a:lnT>
+                    <a:lnB w="12700" cap="flat" cmpd="sng" algn="ctr">
+                      <a:solidFill>
+                        <a:schemeClr val="tx1"/>
+                      </a:solidFill>
+                      <a:prstDash val="solid"/>
+                      <a:round/>
+                      <a:headEnd type="none" w="med" len="med"/>
+                      <a:tailEnd type="none" w="med" len="med"/>
+                    </a:lnB>
+                    <a:lnTlToBr w="12700" cmpd="sng">
+                      <a:noFill/>
+                      <a:prstDash val="solid"/>
+                    </a:lnTlToBr>
+                    <a:lnBlToTr w="12700" cmpd="sng">
+                      <a:noFill/>
+                      <a:prstDash val="solid"/>
+                    </a:lnBlToTr>
+                    <a:noFill/>
+                  </a:tcPr>
+                </a:tc>
+                <a:extLst>
+                  <a:ext uri="{0D108BD9-81ED-4DB2-BD59-A6C34878D82A}">
+                    <a16:rowId xmlns:a16="http://schemas.microsoft.com/office/drawing/2014/main" val="1223821213"/>
+                  </a:ext>
+                </a:extLst>
+              </a:tr>
+              <a:tr h="609143">
+                <a:tc>
+                  <a:txBody>
+                    <a:bodyPr/>
+                    <a:lstStyle/>
+                    <a:p>
+                      <a:r>
+                        <a:rPr lang="en-US"/>
+                        <a:t>forceDelete()</a:t>
+                      </a:r>
+                    </a:p>
+                  </a:txBody>
+                  <a:tcPr anchor="ctr">
+                    <a:lnL w="12700" cap="flat" cmpd="sng" algn="ctr">
+                      <a:solidFill>
+                        <a:schemeClr val="tx1"/>
+                      </a:solidFill>
+                      <a:prstDash val="solid"/>
+                      <a:round/>
+                      <a:headEnd type="none" w="med" len="med"/>
+                      <a:tailEnd type="none" w="med" len="med"/>
+                    </a:lnL>
+                    <a:lnR w="12700" cap="flat" cmpd="sng" algn="ctr">
+                      <a:solidFill>
+                        <a:schemeClr val="tx1"/>
+                      </a:solidFill>
+                      <a:prstDash val="solid"/>
+                      <a:round/>
+                      <a:headEnd type="none" w="med" len="med"/>
+                      <a:tailEnd type="none" w="med" len="med"/>
+                    </a:lnR>
+                    <a:lnT w="12700" cap="flat" cmpd="sng" algn="ctr">
+                      <a:solidFill>
+                        <a:schemeClr val="tx1"/>
+                      </a:solidFill>
+                      <a:prstDash val="solid"/>
+                      <a:round/>
+                      <a:headEnd type="none" w="med" len="med"/>
+                      <a:tailEnd type="none" w="med" len="med"/>
+                    </a:lnT>
+                    <a:lnB w="12700" cap="flat" cmpd="sng" algn="ctr">
+                      <a:solidFill>
+                        <a:schemeClr val="tx1"/>
+                      </a:solidFill>
+                      <a:prstDash val="solid"/>
+                      <a:round/>
+                      <a:headEnd type="none" w="med" len="med"/>
+                      <a:tailEnd type="none" w="med" len="med"/>
+                    </a:lnB>
+                    <a:lnTlToBr w="12700" cmpd="sng">
+                      <a:noFill/>
+                      <a:prstDash val="solid"/>
+                    </a:lnTlToBr>
+                    <a:lnBlToTr w="12700" cmpd="sng">
+                      <a:noFill/>
+                      <a:prstDash val="solid"/>
+                    </a:lnBlToTr>
+                    <a:noFill/>
+                  </a:tcPr>
+                </a:tc>
+                <a:tc>
+                  <a:txBody>
+                    <a:bodyPr/>
+                    <a:lstStyle/>
+                    <a:p>
+                      <a:r>
+                        <a:rPr lang="en-US"/>
+                        <a:t>Qeydi </a:t>
+                      </a:r>
+                      <a:r>
+                        <a:rPr lang="en-US" b="1"/>
+                        <a:t>tamamilə silir</a:t>
+                      </a:r>
+                      <a:r>
+                        <a:rPr lang="en-US"/>
+                        <a:t>, yəni DB-dən birdəfəlik silir</a:t>
+                      </a:r>
+                    </a:p>
+                  </a:txBody>
+                  <a:tcPr anchor="ctr">
+                    <a:lnL w="12700" cap="flat" cmpd="sng" algn="ctr">
+                      <a:solidFill>
+                        <a:schemeClr val="tx1"/>
+                      </a:solidFill>
+                      <a:prstDash val="solid"/>
+                      <a:round/>
+                      <a:headEnd type="none" w="med" len="med"/>
+                      <a:tailEnd type="none" w="med" len="med"/>
+                    </a:lnL>
+                    <a:lnR w="12700" cap="flat" cmpd="sng" algn="ctr">
+                      <a:solidFill>
+                        <a:schemeClr val="tx1"/>
+                      </a:solidFill>
+                      <a:prstDash val="solid"/>
+                      <a:round/>
+                      <a:headEnd type="none" w="med" len="med"/>
+                      <a:tailEnd type="none" w="med" len="med"/>
+                    </a:lnR>
+                    <a:lnT w="12700" cap="flat" cmpd="sng" algn="ctr">
+                      <a:solidFill>
+                        <a:schemeClr val="tx1"/>
+                      </a:solidFill>
+                      <a:prstDash val="solid"/>
+                      <a:round/>
+                      <a:headEnd type="none" w="med" len="med"/>
+                      <a:tailEnd type="none" w="med" len="med"/>
+                    </a:lnT>
+                    <a:lnB w="12700" cap="flat" cmpd="sng" algn="ctr">
+                      <a:solidFill>
+                        <a:schemeClr val="tx1"/>
+                      </a:solidFill>
+                      <a:prstDash val="solid"/>
+                      <a:round/>
+                      <a:headEnd type="none" w="med" len="med"/>
+                      <a:tailEnd type="none" w="med" len="med"/>
+                    </a:lnB>
+                    <a:lnTlToBr w="12700" cmpd="sng">
+                      <a:noFill/>
+                      <a:prstDash val="solid"/>
+                    </a:lnTlToBr>
+                    <a:lnBlToTr w="12700" cmpd="sng">
+                      <a:noFill/>
+                      <a:prstDash val="solid"/>
+                    </a:lnBlToTr>
+                    <a:noFill/>
+                  </a:tcPr>
+                </a:tc>
+                <a:extLst>
+                  <a:ext uri="{0D108BD9-81ED-4DB2-BD59-A6C34878D82A}">
+                    <a16:rowId xmlns:a16="http://schemas.microsoft.com/office/drawing/2014/main" val="2203475768"/>
+                  </a:ext>
+                </a:extLst>
+              </a:tr>
+            </a:tbl>
+          </a:graphicData>
+        </a:graphic>
+      </p:graphicFrame>
+    </p:spTree>
+    <p:extLst>
+      <p:ext uri="{BB962C8B-B14F-4D97-AF65-F5344CB8AC3E}">
+        <p14:creationId xmlns:p14="http://schemas.microsoft.com/office/powerpoint/2010/main" val="3095838342"/>
+      </p:ext>
+    </p:extLst>
+  </p:cSld>
+  <p:clrMapOvr>
+    <a:masterClrMapping/>
+  </p:clrMapOvr>
+</p:sld>
+</file>
+
+<file path=ppt/slides/slide9.xml><?xml version="1.0" encoding="utf-8"?>
+<p:sld xmlns:a="http://schemas.openxmlformats.org/drawingml/2006/main" xmlns:r="http://schemas.openxmlformats.org/officeDocument/2006/relationships" xmlns:p="http://schemas.openxmlformats.org/presentationml/2006/main">
+  <p:cSld>
+    <p:spTree>
+      <p:nvGrpSpPr>
+        <p:cNvPr id="1" name="">
+          <a:extLst>
+            <a:ext uri="{FF2B5EF4-FFF2-40B4-BE49-F238E27FC236}">
+              <a16:creationId xmlns:a16="http://schemas.microsoft.com/office/drawing/2014/main" id="{196E726F-0D63-9482-DAD1-09B3D11A5AC6}"/>
+            </a:ext>
+          </a:extLst>
+        </p:cNvPr>
+        <p:cNvGrpSpPr/>
+        <p:nvPr/>
+      </p:nvGrpSpPr>
+      <p:grpSpPr>
+        <a:xfrm>
+          <a:off x="0" y="0"/>
+          <a:ext cx="0" cy="0"/>
+          <a:chOff x="0" y="0"/>
+          <a:chExt cx="0" cy="0"/>
+        </a:xfrm>
+      </p:grpSpPr>
+      <p:sp>
+        <p:nvSpPr>
+          <p:cNvPr id="3" name="TextBox 2">
+            <a:extLst>
+              <a:ext uri="{FF2B5EF4-FFF2-40B4-BE49-F238E27FC236}">
+                <a16:creationId xmlns:a16="http://schemas.microsoft.com/office/drawing/2014/main" id="{49592815-767E-1235-E5E5-57362C6FDD31}"/>
+              </a:ext>
+            </a:extLst>
+          </p:cNvPr>
+          <p:cNvSpPr txBox="1"/>
+          <p:nvPr/>
+        </p:nvSpPr>
+        <p:spPr>
+          <a:xfrm>
+            <a:off x="217714" y="255046"/>
             <a:ext cx="11756571" cy="355354"/>
           </a:xfrm>
           <a:prstGeom prst="rect">
@@ -3628,25 +6400,72 @@
               <a:buNone/>
             </a:pPr>
             <a:r>
-              <a:rPr kumimoji="0" lang="en-US" altLang="en-US" sz="1300" b="0" i="0" u="none" strike="noStrike" cap="none" normalizeH="0" baseline="0">
-                <a:ln>
-                  <a:noFill/>
-                </a:ln>
-                <a:solidFill>
-                  <a:schemeClr val="tx1"/>
-                </a:solidFill>
-                <a:effectLst/>
-                <a:latin typeface="Arial" panose="020B0604020202020204" pitchFamily="34" charset="0"/>
-              </a:rPr>
-              <a:t>.</a:t>
-            </a:r>
-          </a:p>
-        </p:txBody>
-      </p:sp>
+              <a:rPr lang="az-Latn-AZ" altLang="en-US" sz="1300">
+                <a:latin typeface="Arial" panose="020B0604020202020204" pitchFamily="34" charset="0"/>
+              </a:rPr>
+              <a:t>Nəticə aşağıdakı kimidir. </a:t>
+            </a:r>
+            <a:endParaRPr kumimoji="0" lang="en-US" altLang="en-US" sz="1300" b="0" i="0" u="none" strike="noStrike" cap="none" normalizeH="0" baseline="0">
+              <a:ln>
+                <a:noFill/>
+              </a:ln>
+              <a:solidFill>
+                <a:schemeClr val="tx1"/>
+              </a:solidFill>
+              <a:effectLst/>
+              <a:latin typeface="Arial" panose="020B0604020202020204" pitchFamily="34" charset="0"/>
+            </a:endParaRPr>
+          </a:p>
+        </p:txBody>
+      </p:sp>
+      <p:pic>
+        <p:nvPicPr>
+          <p:cNvPr id="4" name="Picture 3">
+            <a:extLst>
+              <a:ext uri="{FF2B5EF4-FFF2-40B4-BE49-F238E27FC236}">
+                <a16:creationId xmlns:a16="http://schemas.microsoft.com/office/drawing/2014/main" id="{34EB14A2-01C6-25B0-C17B-4A8B323040D4}"/>
+              </a:ext>
+            </a:extLst>
+          </p:cNvPr>
+          <p:cNvPicPr>
+            <a:picLocks noChangeAspect="1"/>
+          </p:cNvPicPr>
+          <p:nvPr/>
+        </p:nvPicPr>
+        <p:blipFill>
+          <a:blip r:embed="rId2"/>
+          <a:stretch>
+            <a:fillRect/>
+          </a:stretch>
+        </p:blipFill>
+        <p:spPr>
+          <a:xfrm>
+            <a:off x="0" y="4202317"/>
+            <a:ext cx="12192000" cy="2655683"/>
+          </a:xfrm>
+          <a:prstGeom prst="rect">
+            <a:avLst/>
+          </a:prstGeom>
+          <a:ln w="38100" cap="sq">
+            <a:solidFill>
+              <a:srgbClr val="000000"/>
+            </a:solidFill>
+            <a:prstDash val="solid"/>
+            <a:miter lim="800000"/>
+          </a:ln>
+          <a:effectLst>
+            <a:outerShdw blurRad="50800" dist="38100" dir="2700000" algn="tl" rotWithShape="0">
+              <a:srgbClr val="000000">
+                <a:alpha val="43000"/>
+              </a:srgbClr>
+            </a:outerShdw>
+          </a:effectLst>
+        </p:spPr>
+      </p:pic>
     </p:spTree>
     <p:extLst>
       <p:ext uri="{BB962C8B-B14F-4D97-AF65-F5344CB8AC3E}">
-        <p14:creationId xmlns:p14="http://schemas.microsoft.com/office/powerpoint/2010/main" val="3095838342"/>
+        <p14:creationId xmlns:p14="http://schemas.microsoft.com/office/powerpoint/2010/main" val="2264386411"/>
       </p:ext>
     </p:extLst>
   </p:cSld>
